--- a/exports/pptx/lessons/senior-module-09-subtraction-nikhilam/day-07-twos-complement.pptx
+++ b/exports/pptx/lessons/senior-module-09-subtraction-nikhilam/day-07-twos-complement.pptx
@@ -3626,7 +3626,7 @@
         <p:spPr>
           <a:xfrm>
             <a:off x="634901" y="883593"/>
-            <a:ext cx="8102798" cy="1462683"/>
+            <a:ext cx="8102798" cy="487561"/>
           </a:xfrm>
           <a:prstGeom prst="rect">
             <a:avLst/>
@@ -3657,7 +3657,7 @@
                 <a:ea typeface="Georgia" pitchFamily="34" charset="-122"/>
                 <a:cs typeface="Georgia" pitchFamily="34" charset="-120"/>
               </a:rPr>
-              <a:t>State the observable phenomenon first.</a:t>
+              <a:t>Bridge to computing.</a:t>
             </a:r>
             <a:pPr algn="l" indent="0" marL="0">
               <a:lnSpc>
@@ -3677,31 +3677,27 @@
                 <a:ea typeface="Georgia" pitchFamily="34" charset="-122"/>
                 <a:cs typeface="Georgia" pitchFamily="34" charset="-120"/>
               </a:rPr>
-              <a:t> Whatever the day's idea is — a number trick, a celestial pattern, a herb's identifying feature — start with the thing students can see, hear, or do.</a:t>
-            </a:r>
-            <a:endParaRPr lang="en-US" sz="1200" dirty="0"/>
-          </a:p>
-          <a:p>
-            <a:pPr algn="l" marL="342900" indent="-342900">
+              <a:t> Modern computers don't have a subtraction circuit — they have an ADDER circuit. They subtract by adding the </a:t>
+            </a:r>
+            <a:pPr algn="l" indent="0" marL="0">
               <a:lnSpc>
                 <a:spcPts val="1620"/>
               </a:lnSpc>
               <a:spcAft>
                 <a:spcPts val="300"/>
               </a:spcAft>
-              <a:buSzPct val="100000"/>
-              <a:buChar char="•"/>
-            </a:pPr>
-            <a:r>
-              <a:rPr lang="en-US" sz="1200" b="1" dirty="0">
-                <a:solidFill>
-                  <a:srgbClr val="1A1A1A"/>
-                </a:solidFill>
-                <a:latin typeface="Georgia" pitchFamily="34" charset="0"/>
-                <a:ea typeface="Georgia" pitchFamily="34" charset="-122"/>
-                <a:cs typeface="Georgia" pitchFamily="34" charset="-120"/>
-              </a:rPr>
-              <a:t>Introduce the Sanskrit term.</a:t>
+              <a:buNone/>
+            </a:pPr>
+            <a:r>
+              <a:rPr lang="en-US" sz="1200" i="1" dirty="0">
+                <a:solidFill>
+                  <a:srgbClr val="1A1A1A"/>
+                </a:solidFill>
+                <a:latin typeface="Georgia" pitchFamily="34" charset="0"/>
+                <a:ea typeface="Georgia" pitchFamily="34" charset="-122"/>
+                <a:cs typeface="Georgia" pitchFamily="34" charset="-120"/>
+              </a:rPr>
+              <a:t>two's complement</a:t>
             </a:r>
             <a:pPr algn="l" indent="0" marL="0">
               <a:lnSpc>
@@ -3721,139 +3717,7 @@
                 <a:ea typeface="Georgia" pitchFamily="34" charset="-122"/>
                 <a:cs typeface="Georgia" pitchFamily="34" charset="-120"/>
               </a:rPr>
-              <a:t> Once, in the triple format, then italicised only.</a:t>
-            </a:r>
-            <a:endParaRPr lang="en-US" sz="1200" dirty="0"/>
-          </a:p>
-          <a:p>
-            <a:pPr algn="l" marL="342900" indent="-342900">
-              <a:lnSpc>
-                <a:spcPts val="1620"/>
-              </a:lnSpc>
-              <a:spcAft>
-                <a:spcPts val="300"/>
-              </a:spcAft>
-              <a:buSzPct val="100000"/>
-              <a:buChar char="•"/>
-            </a:pPr>
-            <a:r>
-              <a:rPr lang="en-US" sz="1200" b="1" dirty="0">
-                <a:solidFill>
-                  <a:srgbClr val="1A1A1A"/>
-                </a:solidFill>
-                <a:latin typeface="Georgia" pitchFamily="34" charset="0"/>
-                <a:ea typeface="Georgia" pitchFamily="34" charset="-122"/>
-                <a:cs typeface="Georgia" pitchFamily="34" charset="-120"/>
-              </a:rPr>
-              <a:t>Build the conceptual map.</a:t>
-            </a:r>
-            <a:pPr algn="l" indent="0" marL="0">
-              <a:lnSpc>
-                <a:spcPts val="1620"/>
-              </a:lnSpc>
-              <a:spcAft>
-                <a:spcPts val="300"/>
-              </a:spcAft>
-              <a:buNone/>
-            </a:pPr>
-            <a:r>
-              <a:rPr lang="en-US" sz="1200" dirty="0">
-                <a:solidFill>
-                  <a:srgbClr val="1A1A1A"/>
-                </a:solidFill>
-                <a:latin typeface="Georgia" pitchFamily="34" charset="0"/>
-                <a:ea typeface="Georgia" pitchFamily="34" charset="-122"/>
-                <a:cs typeface="Georgia" pitchFamily="34" charset="-120"/>
-              </a:rPr>
-              <a:t> Connect today's idea to prior modules (especially Module 2 if applicable) and prior days.</a:t>
-            </a:r>
-            <a:endParaRPr lang="en-US" sz="1200" dirty="0"/>
-          </a:p>
-          <a:p>
-            <a:pPr algn="l" marL="342900" indent="-342900">
-              <a:lnSpc>
-                <a:spcPts val="1620"/>
-              </a:lnSpc>
-              <a:spcAft>
-                <a:spcPts val="300"/>
-              </a:spcAft>
-              <a:buSzPct val="100000"/>
-              <a:buChar char="•"/>
-            </a:pPr>
-            <a:r>
-              <a:rPr lang="en-US" sz="1200" b="1" dirty="0">
-                <a:solidFill>
-                  <a:srgbClr val="1A1A1A"/>
-                </a:solidFill>
-                <a:latin typeface="Georgia" pitchFamily="34" charset="0"/>
-                <a:ea typeface="Georgia" pitchFamily="34" charset="-122"/>
-                <a:cs typeface="Georgia" pitchFamily="34" charset="-120"/>
-              </a:rPr>
-              <a:t>Work an example</a:t>
-            </a:r>
-            <a:pPr algn="l" indent="0" marL="0">
-              <a:lnSpc>
-                <a:spcPts val="1620"/>
-              </a:lnSpc>
-              <a:spcAft>
-                <a:spcPts val="300"/>
-              </a:spcAft>
-              <a:buNone/>
-            </a:pPr>
-            <a:r>
-              <a:rPr lang="en-US" sz="1200" dirty="0">
-                <a:solidFill>
-                  <a:srgbClr val="1A1A1A"/>
-                </a:solidFill>
-                <a:latin typeface="Georgia" pitchFamily="34" charset="0"/>
-                <a:ea typeface="Georgia" pitchFamily="34" charset="-122"/>
-                <a:cs typeface="Georgia" pitchFamily="34" charset="-120"/>
-              </a:rPr>
-              <a:t> with the whole class on the board.</a:t>
-            </a:r>
-            <a:endParaRPr lang="en-US" sz="1200" dirty="0"/>
-          </a:p>
-          <a:p>
-            <a:pPr algn="l" marL="342900" indent="-342900">
-              <a:lnSpc>
-                <a:spcPts val="1620"/>
-              </a:lnSpc>
-              <a:spcAft>
-                <a:spcPts val="300"/>
-              </a:spcAft>
-              <a:buSzPct val="100000"/>
-              <a:buChar char="•"/>
-            </a:pPr>
-            <a:r>
-              <a:rPr lang="en-US" sz="1200" b="1" dirty="0">
-                <a:solidFill>
-                  <a:srgbClr val="1A1A1A"/>
-                </a:solidFill>
-                <a:latin typeface="Georgia" pitchFamily="34" charset="0"/>
-                <a:ea typeface="Georgia" pitchFamily="34" charset="-122"/>
-                <a:cs typeface="Georgia" pitchFamily="34" charset="-120"/>
-              </a:rPr>
-              <a:t>Independent or paired practice</a:t>
-            </a:r>
-            <a:pPr algn="l" indent="0" marL="0">
-              <a:lnSpc>
-                <a:spcPts val="1620"/>
-              </a:lnSpc>
-              <a:spcAft>
-                <a:spcPts val="300"/>
-              </a:spcAft>
-              <a:buNone/>
-            </a:pPr>
-            <a:r>
-              <a:rPr lang="en-US" sz="1200" dirty="0">
-                <a:solidFill>
-                  <a:srgbClr val="1A1A1A"/>
-                </a:solidFill>
-                <a:latin typeface="Georgia" pitchFamily="34" charset="0"/>
-                <a:ea typeface="Georgia" pitchFamily="34" charset="-122"/>
-                <a:cs typeface="Georgia" pitchFamily="34" charset="-120"/>
-              </a:rPr>
-              <a:t> for ~5 minutes.</a:t>
+              <a:t> of the subtrahend. This is the same Nikhilam idea, in binary.</a:t>
             </a:r>
             <a:endParaRPr lang="en-US" sz="1200" dirty="0"/>
           </a:p>
@@ -3867,7 +3731,427 @@
         </p:nvSpPr>
         <p:spPr>
           <a:xfrm>
-            <a:off x="406301" y="4434929"/>
+            <a:off x="634901" y="1472654"/>
+            <a:ext cx="8102798" cy="281880"/>
+          </a:xfrm>
+          <a:prstGeom prst="rect">
+            <a:avLst/>
+          </a:prstGeom>
+          <a:noFill/>
+          <a:ln/>
+        </p:spPr>
+        <p:txBody>
+          <a:bodyPr wrap="square" lIns="0" tIns="0" rIns="0" bIns="0" rtlCol="0" anchor="t"/>
+          <a:lstStyle/>
+          <a:p>
+            <a:pPr algn="l" marL="342900" indent="-342900">
+              <a:lnSpc>
+                <a:spcPts val="1620"/>
+              </a:lnSpc>
+              <a:spcAft>
+                <a:spcPts val="300"/>
+              </a:spcAft>
+              <a:buSzPct val="100000"/>
+              <a:buChar char="•"/>
+            </a:pPr>
+            <a:r>
+              <a:rPr lang="en-US" sz="1200" b="1" dirty="0">
+                <a:solidFill>
+                  <a:srgbClr val="1A1A1A"/>
+                </a:solidFill>
+                <a:latin typeface="Georgia" pitchFamily="34" charset="0"/>
+                <a:ea typeface="Georgia" pitchFamily="34" charset="-122"/>
+                <a:cs typeface="Georgia" pitchFamily="34" charset="-120"/>
+              </a:rPr>
+              <a:t>Binary Nikhilam.</a:t>
+            </a:r>
+            <a:pPr algn="l" indent="0" marL="0">
+              <a:lnSpc>
+                <a:spcPts val="1620"/>
+              </a:lnSpc>
+              <a:spcAft>
+                <a:spcPts val="300"/>
+              </a:spcAft>
+              <a:buNone/>
+            </a:pPr>
+            <a:r>
+              <a:rPr lang="en-US" sz="1200" dirty="0">
+                <a:solidFill>
+                  <a:srgbClr val="1A1A1A"/>
+                </a:solidFill>
+                <a:latin typeface="Georgia" pitchFamily="34" charset="0"/>
+                <a:ea typeface="Georgia" pitchFamily="34" charset="-122"/>
+                <a:cs typeface="Georgia" pitchFamily="34" charset="-120"/>
+              </a:rPr>
+              <a:t> For an 8-bit number:</a:t>
+            </a:r>
+            <a:endParaRPr lang="en-US" sz="1200" dirty="0"/>
+          </a:p>
+        </p:txBody>
+      </p:sp>
+      <p:sp>
+        <p:nvSpPr>
+          <p:cNvPr id="6" name="Text 4"/>
+          <p:cNvSpPr/>
+          <p:nvPr/>
+        </p:nvSpPr>
+        <p:spPr>
+          <a:xfrm>
+            <a:off x="406301" y="1843385"/>
+            <a:ext cx="8498026" cy="426541"/>
+          </a:xfrm>
+          <a:prstGeom prst="rect">
+            <a:avLst/>
+          </a:prstGeom>
+          <a:noFill/>
+          <a:ln/>
+        </p:spPr>
+        <p:txBody>
+          <a:bodyPr wrap="square" lIns="0" tIns="0" rIns="0" bIns="0" rtlCol="0" anchor="t"/>
+          <a:lstStyle/>
+          <a:p>
+            <a:pPr algn="l" indent="0" marL="0">
+              <a:lnSpc>
+                <a:spcPts val="1680"/>
+              </a:lnSpc>
+              <a:spcBef>
+                <a:spcPts val="300"/>
+              </a:spcBef>
+              <a:spcAft>
+                <a:spcPts val="300"/>
+              </a:spcAft>
+              <a:buNone/>
+            </a:pPr>
+            <a:r>
+              <a:rPr lang="en-US" sz="1200" dirty="0">
+                <a:solidFill>
+                  <a:srgbClr val="1A1A1A"/>
+                </a:solidFill>
+                <a:latin typeface="Georgia" pitchFamily="34" charset="0"/>
+                <a:ea typeface="Georgia" pitchFamily="34" charset="-122"/>
+                <a:cs typeface="Georgia" pitchFamily="34" charset="-120"/>
+              </a:rPr>
+              <a:t>– One's complement: flip every bit (= "all from 1," the binary analogue of "all from 9").    – Two's complement: one's complement + 1.</a:t>
+            </a:r>
+            <a:endParaRPr lang="en-US" sz="1200" dirty="0"/>
+          </a:p>
+        </p:txBody>
+      </p:sp>
+      <p:sp>
+        <p:nvSpPr>
+          <p:cNvPr id="7" name="Text 5"/>
+          <p:cNvSpPr/>
+          <p:nvPr/>
+        </p:nvSpPr>
+        <p:spPr>
+          <a:xfrm>
+            <a:off x="634901" y="2358777"/>
+            <a:ext cx="8102798" cy="281880"/>
+          </a:xfrm>
+          <a:prstGeom prst="rect">
+            <a:avLst/>
+          </a:prstGeom>
+          <a:noFill/>
+          <a:ln/>
+        </p:spPr>
+        <p:txBody>
+          <a:bodyPr wrap="square" lIns="0" tIns="0" rIns="0" bIns="0" rtlCol="0" anchor="t"/>
+          <a:lstStyle/>
+          <a:p>
+            <a:pPr algn="l" marL="342900" indent="-342900">
+              <a:lnSpc>
+                <a:spcPts val="1620"/>
+              </a:lnSpc>
+              <a:spcAft>
+                <a:spcPts val="300"/>
+              </a:spcAft>
+              <a:buSzPct val="100000"/>
+              <a:buChar char="•"/>
+            </a:pPr>
+            <a:r>
+              <a:rPr lang="en-US" sz="1200" b="1" dirty="0">
+                <a:solidFill>
+                  <a:srgbClr val="1A1A1A"/>
+                </a:solidFill>
+                <a:latin typeface="Georgia" pitchFamily="34" charset="0"/>
+                <a:ea typeface="Georgia" pitchFamily="34" charset="-122"/>
+                <a:cs typeface="Georgia" pitchFamily="34" charset="-120"/>
+              </a:rPr>
+              <a:t>Worked example.</a:t>
+            </a:r>
+            <a:pPr algn="l" indent="0" marL="0">
+              <a:lnSpc>
+                <a:spcPts val="1620"/>
+              </a:lnSpc>
+              <a:spcAft>
+                <a:spcPts val="300"/>
+              </a:spcAft>
+              <a:buNone/>
+            </a:pPr>
+            <a:r>
+              <a:rPr lang="en-US" sz="1200" dirty="0">
+                <a:solidFill>
+                  <a:srgbClr val="1A1A1A"/>
+                </a:solidFill>
+                <a:latin typeface="Georgia" pitchFamily="34" charset="0"/>
+                <a:ea typeface="Georgia" pitchFamily="34" charset="-122"/>
+                <a:cs typeface="Georgia" pitchFamily="34" charset="-120"/>
+              </a:rPr>
+              <a:t> Compute 9 − 5 in 8-bit binary:</a:t>
+            </a:r>
+            <a:endParaRPr lang="en-US" sz="1200" dirty="0"/>
+          </a:p>
+        </p:txBody>
+      </p:sp>
+      <p:sp>
+        <p:nvSpPr>
+          <p:cNvPr id="8" name="Text 6"/>
+          <p:cNvSpPr/>
+          <p:nvPr/>
+        </p:nvSpPr>
+        <p:spPr>
+          <a:xfrm>
+            <a:off x="406301" y="2729508"/>
+            <a:ext cx="8498026" cy="426541"/>
+          </a:xfrm>
+          <a:prstGeom prst="rect">
+            <a:avLst/>
+          </a:prstGeom>
+          <a:noFill/>
+          <a:ln/>
+        </p:spPr>
+        <p:txBody>
+          <a:bodyPr wrap="square" lIns="0" tIns="0" rIns="0" bIns="0" rtlCol="0" anchor="t"/>
+          <a:lstStyle/>
+          <a:p>
+            <a:pPr algn="l" indent="0" marL="0">
+              <a:lnSpc>
+                <a:spcPts val="1680"/>
+              </a:lnSpc>
+              <a:spcBef>
+                <a:spcPts val="300"/>
+              </a:spcBef>
+              <a:spcAft>
+                <a:spcPts val="300"/>
+              </a:spcAft>
+              <a:buNone/>
+            </a:pPr>
+            <a:r>
+              <a:rPr lang="en-US" sz="1200" dirty="0">
+                <a:solidFill>
+                  <a:srgbClr val="1A1A1A"/>
+                </a:solidFill>
+                <a:latin typeface="Georgia" pitchFamily="34" charset="0"/>
+                <a:ea typeface="Georgia" pitchFamily="34" charset="-122"/>
+                <a:cs typeface="Georgia" pitchFamily="34" charset="-120"/>
+              </a:rPr>
+              <a:t>– 5 = 00000101    – Flip: 11111010 (one's complement)    – Add 1: 11111011 (two's complement)    – Add to 9 = 00001001: 00001001 + 11111011 = 100000100, drop the overflow bit → 00000100 = 4. ✓</a:t>
+            </a:r>
+            <a:endParaRPr lang="en-US" sz="1200" dirty="0"/>
+          </a:p>
+        </p:txBody>
+      </p:sp>
+      <p:sp>
+        <p:nvSpPr>
+          <p:cNvPr id="9" name="Text 7"/>
+          <p:cNvSpPr/>
+          <p:nvPr/>
+        </p:nvSpPr>
+        <p:spPr>
+          <a:xfrm>
+            <a:off x="634901" y="3244900"/>
+            <a:ext cx="8102798" cy="281880"/>
+          </a:xfrm>
+          <a:prstGeom prst="rect">
+            <a:avLst/>
+          </a:prstGeom>
+          <a:noFill/>
+          <a:ln/>
+        </p:spPr>
+        <p:txBody>
+          <a:bodyPr wrap="square" lIns="0" tIns="0" rIns="0" bIns="0" rtlCol="0" anchor="t"/>
+          <a:lstStyle/>
+          <a:p>
+            <a:pPr algn="l" marL="342900" indent="-342900">
+              <a:lnSpc>
+                <a:spcPts val="1620"/>
+              </a:lnSpc>
+              <a:spcAft>
+                <a:spcPts val="300"/>
+              </a:spcAft>
+              <a:buSzPct val="100000"/>
+              <a:buChar char="•"/>
+            </a:pPr>
+            <a:r>
+              <a:rPr lang="en-US" sz="1200" b="1" dirty="0">
+                <a:solidFill>
+                  <a:srgbClr val="1A1A1A"/>
+                </a:solidFill>
+                <a:latin typeface="Georgia" pitchFamily="34" charset="0"/>
+                <a:ea typeface="Georgia" pitchFamily="34" charset="-122"/>
+                <a:cs typeface="Georgia" pitchFamily="34" charset="-120"/>
+              </a:rPr>
+              <a:t>Source.</a:t>
+            </a:r>
+            <a:pPr algn="l" indent="0" marL="0">
+              <a:lnSpc>
+                <a:spcPts val="1620"/>
+              </a:lnSpc>
+              <a:spcAft>
+                <a:spcPts val="300"/>
+              </a:spcAft>
+              <a:buNone/>
+            </a:pPr>
+            <a:r>
+              <a:rPr lang="en-US" sz="1200" dirty="0">
+                <a:solidFill>
+                  <a:srgbClr val="1A1A1A"/>
+                </a:solidFill>
+                <a:latin typeface="Georgia" pitchFamily="34" charset="0"/>
+                <a:ea typeface="Georgia" pitchFamily="34" charset="-122"/>
+                <a:cs typeface="Georgia" pitchFamily="34" charset="-120"/>
+              </a:rPr>
+              <a:t> D.E. Knuth, </a:t>
+            </a:r>
+            <a:pPr algn="l" indent="0" marL="0">
+              <a:lnSpc>
+                <a:spcPts val="1620"/>
+              </a:lnSpc>
+              <a:spcAft>
+                <a:spcPts val="300"/>
+              </a:spcAft>
+              <a:buNone/>
+            </a:pPr>
+            <a:r>
+              <a:rPr lang="en-US" sz="1200" i="1" dirty="0">
+                <a:solidFill>
+                  <a:srgbClr val="1A1A1A"/>
+                </a:solidFill>
+                <a:latin typeface="Georgia" pitchFamily="34" charset="0"/>
+                <a:ea typeface="Georgia" pitchFamily="34" charset="-122"/>
+                <a:cs typeface="Georgia" pitchFamily="34" charset="-120"/>
+              </a:rPr>
+              <a:t>The Art of Computer Programming</a:t>
+            </a:r>
+            <a:pPr algn="l" indent="0" marL="0">
+              <a:lnSpc>
+                <a:spcPts val="1620"/>
+              </a:lnSpc>
+              <a:spcAft>
+                <a:spcPts val="300"/>
+              </a:spcAft>
+              <a:buNone/>
+            </a:pPr>
+            <a:r>
+              <a:rPr lang="en-US" sz="1200" dirty="0">
+                <a:solidFill>
+                  <a:srgbClr val="1A1A1A"/>
+                </a:solidFill>
+                <a:latin typeface="Georgia" pitchFamily="34" charset="0"/>
+                <a:ea typeface="Georgia" pitchFamily="34" charset="-122"/>
+                <a:cs typeface="Georgia" pitchFamily="34" charset="-120"/>
+              </a:rPr>
+              <a:t>, vol. 2 — full treatment.</a:t>
+            </a:r>
+            <a:endParaRPr lang="en-US" sz="1200" dirty="0"/>
+          </a:p>
+        </p:txBody>
+      </p:sp>
+      <p:sp>
+        <p:nvSpPr>
+          <p:cNvPr id="10" name="Text 8"/>
+          <p:cNvSpPr/>
+          <p:nvPr/>
+        </p:nvSpPr>
+        <p:spPr>
+          <a:xfrm>
+            <a:off x="634901" y="3628281"/>
+            <a:ext cx="8102798" cy="693241"/>
+          </a:xfrm>
+          <a:prstGeom prst="rect">
+            <a:avLst/>
+          </a:prstGeom>
+          <a:noFill/>
+          <a:ln/>
+        </p:spPr>
+        <p:txBody>
+          <a:bodyPr wrap="square" lIns="0" tIns="0" rIns="0" bIns="0" rtlCol="0" anchor="t"/>
+          <a:lstStyle/>
+          <a:p>
+            <a:pPr algn="l" marL="342900" indent="-342900">
+              <a:lnSpc>
+                <a:spcPts val="1620"/>
+              </a:lnSpc>
+              <a:spcAft>
+                <a:spcPts val="300"/>
+              </a:spcAft>
+              <a:buSzPct val="100000"/>
+              <a:buChar char="•"/>
+            </a:pPr>
+            <a:r>
+              <a:rPr lang="en-US" sz="1200" b="1" dirty="0">
+                <a:solidFill>
+                  <a:srgbClr val="1A1A1A"/>
+                </a:solidFill>
+                <a:latin typeface="Georgia" pitchFamily="34" charset="0"/>
+                <a:ea typeface="Georgia" pitchFamily="34" charset="-122"/>
+                <a:cs typeface="Georgia" pitchFamily="34" charset="-120"/>
+              </a:rPr>
+              <a:t>Critical-thinking close.</a:t>
+            </a:r>
+            <a:pPr algn="l" indent="0" marL="0">
+              <a:lnSpc>
+                <a:spcPts val="1620"/>
+              </a:lnSpc>
+              <a:spcAft>
+                <a:spcPts val="300"/>
+              </a:spcAft>
+              <a:buNone/>
+            </a:pPr>
+            <a:r>
+              <a:rPr lang="en-US" sz="1200" dirty="0">
+                <a:solidFill>
+                  <a:srgbClr val="1A1A1A"/>
+                </a:solidFill>
+                <a:latin typeface="Georgia" pitchFamily="34" charset="0"/>
+                <a:ea typeface="Georgia" pitchFamily="34" charset="-122"/>
+                <a:cs typeface="Georgia" pitchFamily="34" charset="-120"/>
+              </a:rPr>
+              <a:t> </a:t>
+            </a:r>
+            <a:pPr algn="l" indent="0" marL="0">
+              <a:lnSpc>
+                <a:spcPts val="1620"/>
+              </a:lnSpc>
+              <a:spcAft>
+                <a:spcPts val="300"/>
+              </a:spcAft>
+              <a:buNone/>
+            </a:pPr>
+            <a:r>
+              <a:rPr lang="en-US" sz="1200" i="1" dirty="0">
+                <a:solidFill>
+                  <a:srgbClr val="1A1A1A"/>
+                </a:solidFill>
+                <a:latin typeface="Georgia" pitchFamily="34" charset="0"/>
+                <a:ea typeface="Georgia" pitchFamily="34" charset="-122"/>
+                <a:cs typeface="Georgia" pitchFamily="34" charset="-120"/>
+              </a:rPr>
+              <a:t>"The Nikhilam sūtra (or its decimal-complement principle) and binary two's complement both date their origins to vastly different traditions and eras. What does this tell us about (a) the universality of certain algorithmic ideas and (b) the limits of cultural-priority claims?"</a:t>
+            </a:r>
+            <a:endParaRPr lang="en-US" sz="1200" dirty="0"/>
+          </a:p>
+        </p:txBody>
+      </p:sp>
+      <p:sp>
+        <p:nvSpPr>
+          <p:cNvPr id="11" name="Text 9"/>
+          <p:cNvSpPr/>
+          <p:nvPr/>
+        </p:nvSpPr>
+        <p:spPr>
+          <a:xfrm>
+            <a:off x="406301" y="4486573"/>
             <a:ext cx="8498026" cy="213271"/>
           </a:xfrm>
           <a:prstGeom prst="rect">

--- a/exports/pptx/lessons/senior-module-09-subtraction-nikhilam/day-07-twos-complement.pptx
+++ b/exports/pptx/lessons/senior-module-09-subtraction-nikhilam/day-07-twos-complement.pptx
@@ -16,9 +16,12 @@
     <p:sldId id="264" r:id="rId10"/>
     <p:sldId id="265" r:id="rId11"/>
     <p:sldId id="266" r:id="rId12"/>
+    <p:sldId id="267" r:id="rId13"/>
+    <p:sldId id="268" r:id="rId14"/>
+    <p:sldId id="269" r:id="rId15"/>
   </p:sldIdLst>
   <p:notesMasterIdLst>
-    <p:notesMasterId r:id="rId13"/>
+    <p:notesMasterId r:id="rId16"/>
   </p:notesMasterIdLst>
   <p:sldSz cx="9144000" cy="5143500"/>
   <p:notesSz cx="5143500" cy="9144000"/>
@@ -712,6 +715,270 @@
             <a:fld id="{F7021451-1387-4CA6-816F-3879F97B5CBC}" type="slidenum">
               <a:rPr lang="en-US"/>
               <a:t>11</a:t>
+            </a:fld>
+            <a:endParaRPr lang="en-US"/>
+          </a:p>
+        </p:txBody>
+      </p:sp>
+    </p:spTree>
+    <p:extLst>
+      <p:ext uri="{BB962C8B-B14F-4D97-AF65-F5344CB8AC3E}">
+        <p14:creationId xmlns:p14="http://schemas.microsoft.com/office/powerpoint/2010/main" val="1024086991"/>
+      </p:ext>
+    </p:extLst>
+  </p:cSld>
+  <p:clrMapOvr>
+    <a:masterClrMapping/>
+  </p:clrMapOvr>
+</p:notes>
+</file>
+
+<file path=ppt/notesSlides/notesSlide12.xml><?xml version="1.0" encoding="utf-8"?>
+<p:notes xmlns:a="http://schemas.openxmlformats.org/drawingml/2006/main" xmlns:r="http://schemas.openxmlformats.org/officeDocument/2006/relationships" xmlns:p="http://schemas.openxmlformats.org/presentationml/2006/main">
+  <p:cSld>
+    <p:spTree>
+      <p:nvGrpSpPr>
+        <p:cNvPr id="1" name=""/>
+        <p:cNvGrpSpPr/>
+        <p:nvPr/>
+      </p:nvGrpSpPr>
+      <p:grpSpPr>
+        <a:xfrm>
+          <a:off x="0" y="0"/>
+          <a:ext cx="0" cy="0"/>
+          <a:chOff x="0" y="0"/>
+          <a:chExt cx="0" cy="0"/>
+        </a:xfrm>
+      </p:grpSpPr>
+      <p:sp>
+        <p:nvSpPr>
+          <p:cNvPr id="2" name="Slide Image Placeholder 1"/>
+          <p:cNvSpPr>
+            <a:spLocks noGrp="1" noRot="1" noChangeAspect="1"/>
+          </p:cNvSpPr>
+          <p:nvPr>
+            <p:ph type="sldImg"/>
+          </p:nvPr>
+        </p:nvSpPr>
+        <p:spPr/>
+      </p:sp>
+      <p:sp>
+        <p:nvSpPr>
+          <p:cNvPr id="3" name="Notes Placeholder 2"/>
+          <p:cNvSpPr>
+            <a:spLocks noGrp="1"/>
+          </p:cNvSpPr>
+          <p:nvPr>
+            <p:ph type="body" idx="1"/>
+          </p:nvPr>
+        </p:nvSpPr>
+        <p:spPr/>
+        <p:txBody>
+          <a:bodyPr/>
+          <a:lstStyle/>
+          <a:p>
+            <a:r>
+              <a:rPr lang="en-US" dirty="0"/>
+              <a:t/>
+            </a:r>
+            <a:endParaRPr lang="en-US" dirty="0"/>
+          </a:p>
+        </p:txBody>
+      </p:sp>
+      <p:sp>
+        <p:nvSpPr>
+          <p:cNvPr id="4" name="Slide Number Placeholder 3"/>
+          <p:cNvSpPr>
+            <a:spLocks noGrp="1"/>
+          </p:cNvSpPr>
+          <p:nvPr>
+            <p:ph type="sldNum" sz="quarter" idx="10"/>
+          </p:nvPr>
+        </p:nvSpPr>
+        <p:spPr/>
+        <p:txBody>
+          <a:bodyPr/>
+          <a:lstStyle/>
+          <a:p>
+            <a:fld id="{F7021451-1387-4CA6-816F-3879F97B5CBC}" type="slidenum">
+              <a:rPr lang="en-US"/>
+              <a:t>12</a:t>
+            </a:fld>
+            <a:endParaRPr lang="en-US"/>
+          </a:p>
+        </p:txBody>
+      </p:sp>
+    </p:spTree>
+    <p:extLst>
+      <p:ext uri="{BB962C8B-B14F-4D97-AF65-F5344CB8AC3E}">
+        <p14:creationId xmlns:p14="http://schemas.microsoft.com/office/powerpoint/2010/main" val="1024086991"/>
+      </p:ext>
+    </p:extLst>
+  </p:cSld>
+  <p:clrMapOvr>
+    <a:masterClrMapping/>
+  </p:clrMapOvr>
+</p:notes>
+</file>
+
+<file path=ppt/notesSlides/notesSlide13.xml><?xml version="1.0" encoding="utf-8"?>
+<p:notes xmlns:a="http://schemas.openxmlformats.org/drawingml/2006/main" xmlns:r="http://schemas.openxmlformats.org/officeDocument/2006/relationships" xmlns:p="http://schemas.openxmlformats.org/presentationml/2006/main">
+  <p:cSld>
+    <p:spTree>
+      <p:nvGrpSpPr>
+        <p:cNvPr id="1" name=""/>
+        <p:cNvGrpSpPr/>
+        <p:nvPr/>
+      </p:nvGrpSpPr>
+      <p:grpSpPr>
+        <a:xfrm>
+          <a:off x="0" y="0"/>
+          <a:ext cx="0" cy="0"/>
+          <a:chOff x="0" y="0"/>
+          <a:chExt cx="0" cy="0"/>
+        </a:xfrm>
+      </p:grpSpPr>
+      <p:sp>
+        <p:nvSpPr>
+          <p:cNvPr id="2" name="Slide Image Placeholder 1"/>
+          <p:cNvSpPr>
+            <a:spLocks noGrp="1" noRot="1" noChangeAspect="1"/>
+          </p:cNvSpPr>
+          <p:nvPr>
+            <p:ph type="sldImg"/>
+          </p:nvPr>
+        </p:nvSpPr>
+        <p:spPr/>
+      </p:sp>
+      <p:sp>
+        <p:nvSpPr>
+          <p:cNvPr id="3" name="Notes Placeholder 2"/>
+          <p:cNvSpPr>
+            <a:spLocks noGrp="1"/>
+          </p:cNvSpPr>
+          <p:nvPr>
+            <p:ph type="body" idx="1"/>
+          </p:nvPr>
+        </p:nvSpPr>
+        <p:spPr/>
+        <p:txBody>
+          <a:bodyPr/>
+          <a:lstStyle/>
+          <a:p>
+            <a:r>
+              <a:rPr lang="en-US" dirty="0"/>
+              <a:t/>
+            </a:r>
+            <a:endParaRPr lang="en-US" dirty="0"/>
+          </a:p>
+        </p:txBody>
+      </p:sp>
+      <p:sp>
+        <p:nvSpPr>
+          <p:cNvPr id="4" name="Slide Number Placeholder 3"/>
+          <p:cNvSpPr>
+            <a:spLocks noGrp="1"/>
+          </p:cNvSpPr>
+          <p:nvPr>
+            <p:ph type="sldNum" sz="quarter" idx="10"/>
+          </p:nvPr>
+        </p:nvSpPr>
+        <p:spPr/>
+        <p:txBody>
+          <a:bodyPr/>
+          <a:lstStyle/>
+          <a:p>
+            <a:fld id="{F7021451-1387-4CA6-816F-3879F97B5CBC}" type="slidenum">
+              <a:rPr lang="en-US"/>
+              <a:t>13</a:t>
+            </a:fld>
+            <a:endParaRPr lang="en-US"/>
+          </a:p>
+        </p:txBody>
+      </p:sp>
+    </p:spTree>
+    <p:extLst>
+      <p:ext uri="{BB962C8B-B14F-4D97-AF65-F5344CB8AC3E}">
+        <p14:creationId xmlns:p14="http://schemas.microsoft.com/office/powerpoint/2010/main" val="1024086991"/>
+      </p:ext>
+    </p:extLst>
+  </p:cSld>
+  <p:clrMapOvr>
+    <a:masterClrMapping/>
+  </p:clrMapOvr>
+</p:notes>
+</file>
+
+<file path=ppt/notesSlides/notesSlide14.xml><?xml version="1.0" encoding="utf-8"?>
+<p:notes xmlns:a="http://schemas.openxmlformats.org/drawingml/2006/main" xmlns:r="http://schemas.openxmlformats.org/officeDocument/2006/relationships" xmlns:p="http://schemas.openxmlformats.org/presentationml/2006/main">
+  <p:cSld>
+    <p:spTree>
+      <p:nvGrpSpPr>
+        <p:cNvPr id="1" name=""/>
+        <p:cNvGrpSpPr/>
+        <p:nvPr/>
+      </p:nvGrpSpPr>
+      <p:grpSpPr>
+        <a:xfrm>
+          <a:off x="0" y="0"/>
+          <a:ext cx="0" cy="0"/>
+          <a:chOff x="0" y="0"/>
+          <a:chExt cx="0" cy="0"/>
+        </a:xfrm>
+      </p:grpSpPr>
+      <p:sp>
+        <p:nvSpPr>
+          <p:cNvPr id="2" name="Slide Image Placeholder 1"/>
+          <p:cNvSpPr>
+            <a:spLocks noGrp="1" noRot="1" noChangeAspect="1"/>
+          </p:cNvSpPr>
+          <p:nvPr>
+            <p:ph type="sldImg"/>
+          </p:nvPr>
+        </p:nvSpPr>
+        <p:spPr/>
+      </p:sp>
+      <p:sp>
+        <p:nvSpPr>
+          <p:cNvPr id="3" name="Notes Placeholder 2"/>
+          <p:cNvSpPr>
+            <a:spLocks noGrp="1"/>
+          </p:cNvSpPr>
+          <p:nvPr>
+            <p:ph type="body" idx="1"/>
+          </p:nvPr>
+        </p:nvSpPr>
+        <p:spPr/>
+        <p:txBody>
+          <a:bodyPr/>
+          <a:lstStyle/>
+          <a:p>
+            <a:r>
+              <a:rPr lang="en-US" dirty="0"/>
+              <a:t/>
+            </a:r>
+            <a:endParaRPr lang="en-US" dirty="0"/>
+          </a:p>
+        </p:txBody>
+      </p:sp>
+      <p:sp>
+        <p:nvSpPr>
+          <p:cNvPr id="4" name="Slide Number Placeholder 3"/>
+          <p:cNvSpPr>
+            <a:spLocks noGrp="1"/>
+          </p:cNvSpPr>
+          <p:nvPr>
+            <p:ph type="sldNum" sz="quarter" idx="10"/>
+          </p:nvPr>
+        </p:nvSpPr>
+        <p:spPr/>
+        <p:txBody>
+          <a:bodyPr/>
+          <a:lstStyle/>
+          <a:p>
+            <a:fld id="{F7021451-1387-4CA6-816F-3879F97B5CBC}" type="slidenum">
+              <a:rPr lang="en-US"/>
+              <a:t>14</a:t>
             </a:fld>
             <a:endParaRPr lang="en-US"/>
           </a:p>
@@ -2011,102 +2278,6 @@
         </p:nvSpPr>
         <p:spPr>
           <a:xfrm>
-            <a:off x="406301" y="1223963"/>
-            <a:ext cx="8498026" cy="274290"/>
-          </a:xfrm>
-          <a:prstGeom prst="rect">
-            <a:avLst/>
-          </a:prstGeom>
-          <a:noFill/>
-          <a:ln/>
-        </p:spPr>
-        <p:txBody>
-          <a:bodyPr wrap="square" lIns="0" tIns="0" rIns="0" bIns="0" rtlCol="0" anchor="t"/>
-          <a:lstStyle/>
-          <a:p>
-            <a:pPr algn="l" indent="0" marL="0">
-              <a:lnSpc>
-                <a:spcPts val="2160"/>
-              </a:lnSpc>
-              <a:spcBef>
-                <a:spcPts val="600"/>
-              </a:spcBef>
-              <a:spcAft>
-                <a:spcPts val="800"/>
-              </a:spcAft>
-              <a:buNone/>
-            </a:pPr>
-            <a:r>
-              <a:rPr lang="en-US" sz="1800" b="1" dirty="0">
-                <a:solidFill>
-                  <a:srgbClr val="997929"/>
-                </a:solidFill>
-                <a:latin typeface="Times New Roman" pitchFamily="34" charset="0"/>
-                <a:ea typeface="Times New Roman" pitchFamily="34" charset="-122"/>
-                <a:cs typeface="Times New Roman" pitchFamily="34" charset="-120"/>
-              </a:rPr>
-              <a:t>Learning objective</a:t>
-            </a:r>
-            <a:endParaRPr lang="en-US" sz="1800" dirty="0"/>
-          </a:p>
-        </p:txBody>
-      </p:sp>
-      <p:sp>
-        <p:nvSpPr>
-          <p:cNvPr id="6" name="Text 4"/>
-          <p:cNvSpPr/>
-          <p:nvPr/>
-        </p:nvSpPr>
-        <p:spPr>
-          <a:xfrm>
-            <a:off x="406301" y="1637854"/>
-            <a:ext cx="8498026" cy="213271"/>
-          </a:xfrm>
-          <a:prstGeom prst="rect">
-            <a:avLst/>
-          </a:prstGeom>
-          <a:noFill/>
-          <a:ln/>
-        </p:spPr>
-        <p:txBody>
-          <a:bodyPr wrap="square" lIns="0" tIns="0" rIns="0" bIns="0" rtlCol="0" anchor="t"/>
-          <a:lstStyle/>
-          <a:p>
-            <a:pPr algn="l" indent="0" marL="0">
-              <a:lnSpc>
-                <a:spcPts val="1680"/>
-              </a:lnSpc>
-              <a:spcBef>
-                <a:spcPts val="300"/>
-              </a:spcBef>
-              <a:spcAft>
-                <a:spcPts val="300"/>
-              </a:spcAft>
-              <a:buNone/>
-            </a:pPr>
-            <a:r>
-              <a:rPr lang="en-US" sz="1200" dirty="0">
-                <a:solidFill>
-                  <a:srgbClr val="1A1A1A"/>
-                </a:solidFill>
-                <a:latin typeface="Georgia" pitchFamily="34" charset="0"/>
-                <a:ea typeface="Georgia" pitchFamily="34" charset="-122"/>
-                <a:cs typeface="Georgia" pitchFamily="34" charset="-120"/>
-              </a:rPr>
-              <a:t>By the end of this lesson, students will: show how the same idea underlies binary computer subtraction.</a:t>
-            </a:r>
-            <a:endParaRPr lang="en-US" sz="1200" dirty="0"/>
-          </a:p>
-        </p:txBody>
-      </p:sp>
-      <p:sp>
-        <p:nvSpPr>
-          <p:cNvPr id="7" name="Text 5"/>
-          <p:cNvSpPr/>
-          <p:nvPr/>
-        </p:nvSpPr>
-        <p:spPr>
-          <a:xfrm>
             <a:off x="406301" y="4434929"/>
             <a:ext cx="8498026" cy="213271"/>
           </a:xfrm>
@@ -2251,7 +2422,7 @@
                 <a:ea typeface="Times New Roman" pitchFamily="34" charset="-122"/>
                 <a:cs typeface="Times New Roman" pitchFamily="34" charset="-120"/>
               </a:rPr>
-              <a:t>Differentiation</a:t>
+              <a:t>Activity (15 min)</a:t>
             </a:r>
             <a:endParaRPr lang="en-US" sz="1800" dirty="0"/>
           </a:p>
@@ -2265,8 +2436,8 @@
         </p:nvSpPr>
         <p:spPr>
           <a:xfrm>
-            <a:off x="634901" y="883593"/>
-            <a:ext cx="8102798" cy="525661"/>
+            <a:off x="406301" y="870942"/>
+            <a:ext cx="8498026" cy="436066"/>
           </a:xfrm>
           <a:prstGeom prst="rect">
             <a:avLst/>
@@ -2278,31 +2449,13 @@
           <a:bodyPr wrap="square" lIns="0" tIns="0" rIns="0" bIns="0" rtlCol="0" anchor="t"/>
           <a:lstStyle/>
           <a:p>
-            <a:pPr algn="l" marL="342900" indent="-342900">
-              <a:lnSpc>
-                <a:spcPts val="1620"/>
-              </a:lnSpc>
-              <a:spcAft>
-                <a:spcPts val="300"/>
-              </a:spcAft>
-              <a:buSzPct val="100000"/>
-              <a:buChar char="•"/>
-            </a:pPr>
-            <a:r>
-              <a:rPr lang="en-US" sz="1200" b="1" dirty="0">
-                <a:solidFill>
-                  <a:srgbClr val="1A1A1A"/>
-                </a:solidFill>
-                <a:latin typeface="Georgia" pitchFamily="34" charset="0"/>
-                <a:ea typeface="Georgia" pitchFamily="34" charset="-122"/>
-                <a:cs typeface="Georgia" pitchFamily="34" charset="-120"/>
-              </a:rPr>
-              <a:t>Extension:</a:t>
-            </a:r>
             <a:pPr algn="l" indent="0" marL="0">
               <a:lnSpc>
-                <a:spcPts val="1620"/>
-              </a:lnSpc>
+                <a:spcPts val="1680"/>
+              </a:lnSpc>
+              <a:spcBef>
+                <a:spcPts val="300"/>
+              </a:spcBef>
               <a:spcAft>
                 <a:spcPts val="300"/>
               </a:spcAft>
@@ -2317,36 +2470,38 @@
                 <a:ea typeface="Georgia" pitchFamily="34" charset="-122"/>
                 <a:cs typeface="Georgia" pitchFamily="34" charset="-120"/>
               </a:rPr>
-              <a:t> offer one open question or extra problem for fast finishers.</a:t>
-            </a:r>
-            <a:endParaRPr lang="en-US" sz="1200" dirty="0"/>
-          </a:p>
-          <a:p>
-            <a:pPr algn="l" marL="342900" indent="-342900">
-              <a:lnSpc>
-                <a:spcPts val="1620"/>
-              </a:lnSpc>
-              <a:spcAft>
-                <a:spcPts val="300"/>
-              </a:spcAft>
-              <a:buSzPct val="100000"/>
-              <a:buChar char="•"/>
-            </a:pPr>
-            <a:r>
-              <a:rPr lang="en-US" sz="1200" b="1" dirty="0">
-                <a:solidFill>
-                  <a:srgbClr val="1A1A1A"/>
-                </a:solidFill>
-                <a:latin typeface="Georgia" pitchFamily="34" charset="0"/>
-                <a:ea typeface="Georgia" pitchFamily="34" charset="-122"/>
-                <a:cs typeface="Georgia" pitchFamily="34" charset="-120"/>
-              </a:rPr>
-              <a:t>Support:</a:t>
+              <a:t>A scaled version of </a:t>
             </a:r>
             <a:pPr algn="l" indent="0" marL="0">
               <a:lnSpc>
-                <a:spcPts val="1620"/>
-              </a:lnSpc>
+                <a:spcPts val="1680"/>
+              </a:lnSpc>
+              <a:spcBef>
+                <a:spcPts val="300"/>
+              </a:spcBef>
+              <a:spcAft>
+                <a:spcPts val="300"/>
+              </a:spcAft>
+              <a:buNone/>
+            </a:pPr>
+            <a:r>
+              <a:rPr lang="en-US" sz="1200" i="1" dirty="0">
+                <a:solidFill>
+                  <a:srgbClr val="1A1A1A"/>
+                </a:solidFill>
+                <a:latin typeface="Georgia" pitchFamily="34" charset="0"/>
+                <a:ea typeface="Georgia" pitchFamily="34" charset="-122"/>
+                <a:cs typeface="Georgia" pitchFamily="34" charset="-120"/>
+              </a:rPr>
+              <a:t>Complement Flashcards</a:t>
+            </a:r>
+            <a:pPr algn="l" indent="0" marL="0">
+              <a:lnSpc>
+                <a:spcPts val="1680"/>
+              </a:lnSpc>
+              <a:spcBef>
+                <a:spcPts val="300"/>
+              </a:spcBef>
               <a:spcAft>
                 <a:spcPts val="300"/>
               </a:spcAft>
@@ -2361,7 +2516,53 @@
                 <a:ea typeface="Georgia" pitchFamily="34" charset="-122"/>
                 <a:cs typeface="Georgia" pitchFamily="34" charset="-120"/>
               </a:rPr>
-              <a:t> pair students who need scaffolds; offer partial outlines.</a:t>
+              <a:t> (see </a:t>
+            </a:r>
+            <a:pPr algn="l" indent="0" marL="0">
+              <a:lnSpc>
+                <a:spcPts val="1680"/>
+              </a:lnSpc>
+              <a:spcBef>
+                <a:spcPts val="300"/>
+              </a:spcBef>
+              <a:spcAft>
+                <a:spcPts val="300"/>
+              </a:spcAft>
+              <a:buNone/>
+            </a:pPr>
+            <a:r>
+              <a:rPr lang="en-US" sz="1200" dirty="0">
+                <a:solidFill>
+                  <a:srgbClr val="1A1A1A"/>
+                </a:solidFill>
+                <a:latin typeface="Georgia" pitchFamily="34" charset="0"/>
+                <a:ea typeface="Georgia" pitchFamily="34" charset="-122"/>
+                <a:cs typeface="Georgia" pitchFamily="34" charset="-120"/>
+              </a:rPr>
+              <a:t>activities/</a:t>
+            </a:r>
+            <a:pPr algn="l" indent="0" marL="0">
+              <a:lnSpc>
+                <a:spcPts val="1680"/>
+              </a:lnSpc>
+              <a:spcBef>
+                <a:spcPts val="300"/>
+              </a:spcBef>
+              <a:spcAft>
+                <a:spcPts val="300"/>
+              </a:spcAft>
+              <a:buNone/>
+            </a:pPr>
+            <a:r>
+              <a:rPr lang="en-US" sz="1200" dirty="0">
+                <a:solidFill>
+                  <a:srgbClr val="1A1A1A"/>
+                </a:solidFill>
+                <a:latin typeface="Georgia" pitchFamily="34" charset="0"/>
+                <a:ea typeface="Georgia" pitchFamily="34" charset="-122"/>
+                <a:cs typeface="Georgia" pitchFamily="34" charset="-120"/>
+              </a:rPr>
+              <a:t>). Today's slice: focus on the part of the activity that reinforces Two's Complement in Computers.</a:t>
             </a:r>
             <a:endParaRPr lang="en-US" sz="1200" dirty="0"/>
           </a:p>
@@ -2519,7 +2720,7 @@
                 <a:ea typeface="Times New Roman" pitchFamily="34" charset="-122"/>
                 <a:cs typeface="Times New Roman" pitchFamily="34" charset="-120"/>
               </a:rPr>
-              <a:t>Teacher notes</a:t>
+              <a:t>Wrap-up (5 min)</a:t>
             </a:r>
             <a:endParaRPr lang="en-US" sz="1800" dirty="0"/>
           </a:p>
@@ -2533,8 +2734,8 @@
         </p:nvSpPr>
         <p:spPr>
           <a:xfrm>
-            <a:off x="406301" y="870942"/>
-            <a:ext cx="8498026" cy="426541"/>
+            <a:off x="634901" y="883593"/>
+            <a:ext cx="8102798" cy="525661"/>
           </a:xfrm>
           <a:prstGeom prst="rect">
             <a:avLst/>
@@ -2546,8 +2747,98 @@
           <a:bodyPr wrap="square" lIns="0" tIns="0" rIns="0" bIns="0" rtlCol="0" anchor="t"/>
           <a:lstStyle/>
           <a:p>
+            <a:pPr algn="l" marL="342900" indent="-342900">
+              <a:lnSpc>
+                <a:spcPts val="1620"/>
+              </a:lnSpc>
+              <a:spcAft>
+                <a:spcPts val="300"/>
+              </a:spcAft>
+              <a:buSzPct val="100000"/>
+              <a:buChar char="•"/>
+            </a:pPr>
+            <a:r>
+              <a:rPr lang="en-US" sz="1200" dirty="0">
+                <a:solidFill>
+                  <a:srgbClr val="1A1A1A"/>
+                </a:solidFill>
+                <a:latin typeface="Georgia" pitchFamily="34" charset="0"/>
+                <a:ea typeface="Georgia" pitchFamily="34" charset="-122"/>
+                <a:cs typeface="Georgia" pitchFamily="34" charset="-120"/>
+              </a:rPr>
+              <a:t>One-sentence exit ticket: </a:t>
+            </a:r>
             <a:pPr algn="l" indent="0" marL="0">
               <a:lnSpc>
+                <a:spcPts val="1620"/>
+              </a:lnSpc>
+              <a:spcAft>
+                <a:spcPts val="300"/>
+              </a:spcAft>
+              <a:buNone/>
+            </a:pPr>
+            <a:r>
+              <a:rPr lang="en-US" sz="1200" i="1" dirty="0">
+                <a:solidFill>
+                  <a:srgbClr val="1A1A1A"/>
+                </a:solidFill>
+                <a:latin typeface="Georgia" pitchFamily="34" charset="0"/>
+                <a:ea typeface="Georgia" pitchFamily="34" charset="-122"/>
+                <a:cs typeface="Georgia" pitchFamily="34" charset="-120"/>
+              </a:rPr>
+              <a:t>"What's one thing you learned today?"</a:t>
+            </a:r>
+            <a:endParaRPr lang="en-US" sz="1200" dirty="0"/>
+          </a:p>
+          <a:p>
+            <a:pPr algn="l" marL="342900" indent="-342900">
+              <a:lnSpc>
+                <a:spcPts val="1620"/>
+              </a:lnSpc>
+              <a:spcAft>
+                <a:spcPts val="300"/>
+              </a:spcAft>
+              <a:buSzPct val="100000"/>
+              <a:buChar char="•"/>
+            </a:pPr>
+            <a:r>
+              <a:rPr lang="en-US" sz="1200" dirty="0">
+                <a:solidFill>
+                  <a:srgbClr val="1A1A1A"/>
+                </a:solidFill>
+                <a:latin typeface="Georgia" pitchFamily="34" charset="0"/>
+                <a:ea typeface="Georgia" pitchFamily="34" charset="-122"/>
+                <a:cs typeface="Georgia" pitchFamily="34" charset="-120"/>
+              </a:rPr>
+              <a:t>Preview tomorrow.</a:t>
+            </a:r>
+            <a:endParaRPr lang="en-US" sz="1200" dirty="0"/>
+          </a:p>
+        </p:txBody>
+      </p:sp>
+      <p:sp>
+        <p:nvSpPr>
+          <p:cNvPr id="5" name="Text 3"/>
+          <p:cNvSpPr/>
+          <p:nvPr/>
+        </p:nvSpPr>
+        <p:spPr>
+          <a:xfrm>
+            <a:off x="406301" y="4434929"/>
+            <a:ext cx="8498026" cy="213271"/>
+          </a:xfrm>
+          <a:prstGeom prst="rect">
+            <a:avLst/>
+          </a:prstGeom>
+          <a:noFill/>
+          <a:ln/>
+        </p:spPr>
+        <p:txBody>
+          <a:bodyPr wrap="square" lIns="0" tIns="0" rIns="0" bIns="0" rtlCol="0" anchor="t"/>
+          <a:lstStyle/>
+          <a:p>
+            <a:pPr algn="l" indent="0" marL="0">
+              <a:lnSpc>
                 <a:spcPts val="1680"/>
               </a:lnSpc>
               <a:spcBef>
@@ -2567,7 +2858,707 @@
                 <a:ea typeface="Georgia" pitchFamily="34" charset="-122"/>
                 <a:cs typeface="Georgia" pitchFamily="34" charset="-120"/>
               </a:rPr>
-              <a:t>– Citations: at least one quoted verse with citation per module. Day 1 already includes one if applicable; you may add more. – Connect to prior modules where natural (especially Module 2 pañcabhūta).</a:t>
+              <a:t>Senior ·  · IKS Curriculum</a:t>
+            </a:r>
+            <a:endParaRPr lang="en-US" sz="1200" dirty="0"/>
+          </a:p>
+        </p:txBody>
+      </p:sp>
+    </p:spTree>
+  </p:cSld>
+  <p:clrMapOvr>
+    <a:masterClrMapping/>
+  </p:clrMapOvr>
+</p:sld>
+</file>
+
+<file path=ppt/slides/slide12.xml><?xml version="1.0" encoding="utf-8"?>
+<p:sld xmlns:a="http://schemas.openxmlformats.org/drawingml/2006/main" xmlns:r="http://schemas.openxmlformats.org/officeDocument/2006/relationships" xmlns:p="http://schemas.openxmlformats.org/presentationml/2006/main">
+  <p:cSld name="Slide 12">
+    <p:bg>
+      <p:bgPr>
+        <a:solidFill>
+          <a:srgbClr val="FAF7F2"/>
+        </a:solidFill>
+      </p:bgPr>
+    </p:bg>
+    <p:spTree>
+      <p:nvGrpSpPr>
+        <p:cNvPr id="1" name=""/>
+        <p:cNvGrpSpPr/>
+        <p:nvPr/>
+      </p:nvGrpSpPr>
+      <p:grpSpPr>
+        <a:xfrm>
+          <a:off x="0" y="0"/>
+          <a:ext cx="0" cy="0"/>
+          <a:chOff x="0" y="0"/>
+          <a:chExt cx="0" cy="0"/>
+        </a:xfrm>
+      </p:grpSpPr>
+      <p:sp>
+        <p:nvSpPr>
+          <p:cNvPr id="2" name="Text 0"/>
+          <p:cNvSpPr/>
+          <p:nvPr/>
+        </p:nvSpPr>
+        <p:spPr>
+          <a:xfrm>
+            <a:off x="0" y="0"/>
+            <a:ext cx="9144000" cy="101501"/>
+          </a:xfrm>
+          <a:prstGeom prst="rect">
+            <a:avLst/>
+          </a:prstGeom>
+          <a:solidFill>
+            <a:srgbClr val="5D1D2E"/>
+          </a:solidFill>
+          <a:ln/>
+        </p:spPr>
+        <p:txBody>
+          <a:bodyPr wrap="square" rtlCol="0" anchor="ctr"/>
+          <a:lstStyle/>
+          <a:p>
+            <a:pPr indent="0" marL="0">
+              <a:buNone/>
+            </a:pPr>
+            <a:endParaRPr lang="en-US" dirty="0"/>
+          </a:p>
+        </p:txBody>
+      </p:sp>
+      <p:sp>
+        <p:nvSpPr>
+          <p:cNvPr id="3" name="Text 1"/>
+          <p:cNvSpPr/>
+          <p:nvPr/>
+        </p:nvSpPr>
+        <p:spPr>
+          <a:xfrm>
+            <a:off x="406301" y="457051"/>
+            <a:ext cx="8498026" cy="274290"/>
+          </a:xfrm>
+          <a:prstGeom prst="rect">
+            <a:avLst/>
+          </a:prstGeom>
+          <a:noFill/>
+          <a:ln/>
+        </p:spPr>
+        <p:txBody>
+          <a:bodyPr wrap="square" lIns="0" tIns="0" rIns="0" bIns="0" rtlCol="0" anchor="t"/>
+          <a:lstStyle/>
+          <a:p>
+            <a:pPr algn="l" indent="0" marL="0">
+              <a:lnSpc>
+                <a:spcPts val="2160"/>
+              </a:lnSpc>
+              <a:spcBef>
+                <a:spcPts val="600"/>
+              </a:spcBef>
+              <a:spcAft>
+                <a:spcPts val="800"/>
+              </a:spcAft>
+              <a:buNone/>
+            </a:pPr>
+            <a:r>
+              <a:rPr lang="en-US" sz="1800" b="1" dirty="0">
+                <a:solidFill>
+                  <a:srgbClr val="997929"/>
+                </a:solidFill>
+                <a:latin typeface="Times New Roman" pitchFamily="34" charset="0"/>
+                <a:ea typeface="Times New Roman" pitchFamily="34" charset="-122"/>
+                <a:cs typeface="Times New Roman" pitchFamily="34" charset="-120"/>
+              </a:rPr>
+              <a:t>Homework</a:t>
+            </a:r>
+            <a:endParaRPr lang="en-US" sz="1800" dirty="0"/>
+          </a:p>
+        </p:txBody>
+      </p:sp>
+      <p:sp>
+        <p:nvSpPr>
+          <p:cNvPr id="4" name="Text 2"/>
+          <p:cNvSpPr/>
+          <p:nvPr/>
+        </p:nvSpPr>
+        <p:spPr>
+          <a:xfrm>
+            <a:off x="406301" y="870942"/>
+            <a:ext cx="8498026" cy="222796"/>
+          </a:xfrm>
+          <a:prstGeom prst="rect">
+            <a:avLst/>
+          </a:prstGeom>
+          <a:noFill/>
+          <a:ln/>
+        </p:spPr>
+        <p:txBody>
+          <a:bodyPr wrap="square" lIns="0" tIns="0" rIns="0" bIns="0" rtlCol="0" anchor="t"/>
+          <a:lstStyle/>
+          <a:p>
+            <a:pPr algn="l" indent="0" marL="0">
+              <a:lnSpc>
+                <a:spcPts val="1680"/>
+              </a:lnSpc>
+              <a:spcBef>
+                <a:spcPts val="300"/>
+              </a:spcBef>
+              <a:spcAft>
+                <a:spcPts val="300"/>
+              </a:spcAft>
+              <a:buNone/>
+            </a:pPr>
+            <a:r>
+              <a:rPr lang="en-US" sz="1200" dirty="0">
+                <a:solidFill>
+                  <a:srgbClr val="1A1A1A"/>
+                </a:solidFill>
+                <a:latin typeface="Georgia" pitchFamily="34" charset="0"/>
+                <a:ea typeface="Georgia" pitchFamily="34" charset="-122"/>
+                <a:cs typeface="Georgia" pitchFamily="34" charset="-120"/>
+              </a:rPr>
+              <a:t>(See </a:t>
+            </a:r>
+            <a:pPr algn="l" indent="0" marL="0">
+              <a:lnSpc>
+                <a:spcPts val="1680"/>
+              </a:lnSpc>
+              <a:spcBef>
+                <a:spcPts val="300"/>
+              </a:spcBef>
+              <a:spcAft>
+                <a:spcPts val="300"/>
+              </a:spcAft>
+              <a:buNone/>
+            </a:pPr>
+            <a:r>
+              <a:rPr lang="en-US" sz="1200" dirty="0">
+                <a:solidFill>
+                  <a:srgbClr val="1A1A1A"/>
+                </a:solidFill>
+                <a:latin typeface="Georgia" pitchFamily="34" charset="0"/>
+                <a:ea typeface="Georgia" pitchFamily="34" charset="-122"/>
+                <a:cs typeface="Georgia" pitchFamily="34" charset="-120"/>
+              </a:rPr>
+              <a:t>homework.md</a:t>
+            </a:r>
+            <a:pPr algn="l" indent="0" marL="0">
+              <a:lnSpc>
+                <a:spcPts val="1680"/>
+              </a:lnSpc>
+              <a:spcBef>
+                <a:spcPts val="300"/>
+              </a:spcBef>
+              <a:spcAft>
+                <a:spcPts val="300"/>
+              </a:spcAft>
+              <a:buNone/>
+            </a:pPr>
+            <a:r>
+              <a:rPr lang="en-US" sz="1200" dirty="0">
+                <a:solidFill>
+                  <a:srgbClr val="1A1A1A"/>
+                </a:solidFill>
+                <a:latin typeface="Georgia" pitchFamily="34" charset="0"/>
+                <a:ea typeface="Georgia" pitchFamily="34" charset="-122"/>
+                <a:cs typeface="Georgia" pitchFamily="34" charset="-120"/>
+              </a:rPr>
+              <a:t> for today's task.)</a:t>
+            </a:r>
+            <a:endParaRPr lang="en-US" sz="1200" dirty="0"/>
+          </a:p>
+        </p:txBody>
+      </p:sp>
+      <p:sp>
+        <p:nvSpPr>
+          <p:cNvPr id="5" name="Text 3"/>
+          <p:cNvSpPr/>
+          <p:nvPr/>
+        </p:nvSpPr>
+        <p:spPr>
+          <a:xfrm>
+            <a:off x="406301" y="4434929"/>
+            <a:ext cx="8498026" cy="213271"/>
+          </a:xfrm>
+          <a:prstGeom prst="rect">
+            <a:avLst/>
+          </a:prstGeom>
+          <a:noFill/>
+          <a:ln/>
+        </p:spPr>
+        <p:txBody>
+          <a:bodyPr wrap="square" lIns="0" tIns="0" rIns="0" bIns="0" rtlCol="0" anchor="t"/>
+          <a:lstStyle/>
+          <a:p>
+            <a:pPr algn="l" indent="0" marL="0">
+              <a:lnSpc>
+                <a:spcPts val="1680"/>
+              </a:lnSpc>
+              <a:spcBef>
+                <a:spcPts val="300"/>
+              </a:spcBef>
+              <a:spcAft>
+                <a:spcPts val="300"/>
+              </a:spcAft>
+              <a:buNone/>
+            </a:pPr>
+            <a:r>
+              <a:rPr lang="en-US" sz="1200" dirty="0">
+                <a:solidFill>
+                  <a:srgbClr val="1A1A1A"/>
+                </a:solidFill>
+                <a:latin typeface="Georgia" pitchFamily="34" charset="0"/>
+                <a:ea typeface="Georgia" pitchFamily="34" charset="-122"/>
+                <a:cs typeface="Georgia" pitchFamily="34" charset="-120"/>
+              </a:rPr>
+              <a:t>Senior ·  · IKS Curriculum</a:t>
+            </a:r>
+            <a:endParaRPr lang="en-US" sz="1200" dirty="0"/>
+          </a:p>
+        </p:txBody>
+      </p:sp>
+    </p:spTree>
+  </p:cSld>
+  <p:clrMapOvr>
+    <a:masterClrMapping/>
+  </p:clrMapOvr>
+</p:sld>
+</file>
+
+<file path=ppt/slides/slide13.xml><?xml version="1.0" encoding="utf-8"?>
+<p:sld xmlns:a="http://schemas.openxmlformats.org/drawingml/2006/main" xmlns:r="http://schemas.openxmlformats.org/officeDocument/2006/relationships" xmlns:p="http://schemas.openxmlformats.org/presentationml/2006/main">
+  <p:cSld name="Slide 13">
+    <p:bg>
+      <p:bgPr>
+        <a:solidFill>
+          <a:srgbClr val="FAF7F2"/>
+        </a:solidFill>
+      </p:bgPr>
+    </p:bg>
+    <p:spTree>
+      <p:nvGrpSpPr>
+        <p:cNvPr id="1" name=""/>
+        <p:cNvGrpSpPr/>
+        <p:nvPr/>
+      </p:nvGrpSpPr>
+      <p:grpSpPr>
+        <a:xfrm>
+          <a:off x="0" y="0"/>
+          <a:ext cx="0" cy="0"/>
+          <a:chOff x="0" y="0"/>
+          <a:chExt cx="0" cy="0"/>
+        </a:xfrm>
+      </p:grpSpPr>
+      <p:sp>
+        <p:nvSpPr>
+          <p:cNvPr id="2" name="Text 0"/>
+          <p:cNvSpPr/>
+          <p:nvPr/>
+        </p:nvSpPr>
+        <p:spPr>
+          <a:xfrm>
+            <a:off x="0" y="0"/>
+            <a:ext cx="9144000" cy="101501"/>
+          </a:xfrm>
+          <a:prstGeom prst="rect">
+            <a:avLst/>
+          </a:prstGeom>
+          <a:solidFill>
+            <a:srgbClr val="5D1D2E"/>
+          </a:solidFill>
+          <a:ln/>
+        </p:spPr>
+        <p:txBody>
+          <a:bodyPr wrap="square" rtlCol="0" anchor="ctr"/>
+          <a:lstStyle/>
+          <a:p>
+            <a:pPr indent="0" marL="0">
+              <a:buNone/>
+            </a:pPr>
+            <a:endParaRPr lang="en-US" dirty="0"/>
+          </a:p>
+        </p:txBody>
+      </p:sp>
+      <p:sp>
+        <p:nvSpPr>
+          <p:cNvPr id="3" name="Text 1"/>
+          <p:cNvSpPr/>
+          <p:nvPr/>
+        </p:nvSpPr>
+        <p:spPr>
+          <a:xfrm>
+            <a:off x="406301" y="457051"/>
+            <a:ext cx="8498026" cy="274290"/>
+          </a:xfrm>
+          <a:prstGeom prst="rect">
+            <a:avLst/>
+          </a:prstGeom>
+          <a:noFill/>
+          <a:ln/>
+        </p:spPr>
+        <p:txBody>
+          <a:bodyPr wrap="square" lIns="0" tIns="0" rIns="0" bIns="0" rtlCol="0" anchor="t"/>
+          <a:lstStyle/>
+          <a:p>
+            <a:pPr algn="l" indent="0" marL="0">
+              <a:lnSpc>
+                <a:spcPts val="2160"/>
+              </a:lnSpc>
+              <a:spcBef>
+                <a:spcPts val="600"/>
+              </a:spcBef>
+              <a:spcAft>
+                <a:spcPts val="800"/>
+              </a:spcAft>
+              <a:buNone/>
+            </a:pPr>
+            <a:r>
+              <a:rPr lang="en-US" sz="1800" b="1" dirty="0">
+                <a:solidFill>
+                  <a:srgbClr val="997929"/>
+                </a:solidFill>
+                <a:latin typeface="Times New Roman" pitchFamily="34" charset="0"/>
+                <a:ea typeface="Times New Roman" pitchFamily="34" charset="-122"/>
+                <a:cs typeface="Times New Roman" pitchFamily="34" charset="-120"/>
+              </a:rPr>
+              <a:t>Differentiation</a:t>
+            </a:r>
+            <a:endParaRPr lang="en-US" sz="1800" dirty="0"/>
+          </a:p>
+        </p:txBody>
+      </p:sp>
+      <p:sp>
+        <p:nvSpPr>
+          <p:cNvPr id="4" name="Text 2"/>
+          <p:cNvSpPr/>
+          <p:nvPr/>
+        </p:nvSpPr>
+        <p:spPr>
+          <a:xfrm>
+            <a:off x="634901" y="883593"/>
+            <a:ext cx="8102798" cy="525661"/>
+          </a:xfrm>
+          <a:prstGeom prst="rect">
+            <a:avLst/>
+          </a:prstGeom>
+          <a:noFill/>
+          <a:ln/>
+        </p:spPr>
+        <p:txBody>
+          <a:bodyPr wrap="square" lIns="0" tIns="0" rIns="0" bIns="0" rtlCol="0" anchor="t"/>
+          <a:lstStyle/>
+          <a:p>
+            <a:pPr algn="l" marL="342900" indent="-342900">
+              <a:lnSpc>
+                <a:spcPts val="1620"/>
+              </a:lnSpc>
+              <a:spcAft>
+                <a:spcPts val="300"/>
+              </a:spcAft>
+              <a:buSzPct val="100000"/>
+              <a:buChar char="•"/>
+            </a:pPr>
+            <a:r>
+              <a:rPr lang="en-US" sz="1200" b="1" dirty="0">
+                <a:solidFill>
+                  <a:srgbClr val="1A1A1A"/>
+                </a:solidFill>
+                <a:latin typeface="Georgia" pitchFamily="34" charset="0"/>
+                <a:ea typeface="Georgia" pitchFamily="34" charset="-122"/>
+                <a:cs typeface="Georgia" pitchFamily="34" charset="-120"/>
+              </a:rPr>
+              <a:t>Extension:</a:t>
+            </a:r>
+            <a:pPr algn="l" indent="0" marL="0">
+              <a:lnSpc>
+                <a:spcPts val="1620"/>
+              </a:lnSpc>
+              <a:spcAft>
+                <a:spcPts val="300"/>
+              </a:spcAft>
+              <a:buNone/>
+            </a:pPr>
+            <a:r>
+              <a:rPr lang="en-US" sz="1200" dirty="0">
+                <a:solidFill>
+                  <a:srgbClr val="1A1A1A"/>
+                </a:solidFill>
+                <a:latin typeface="Georgia" pitchFamily="34" charset="0"/>
+                <a:ea typeface="Georgia" pitchFamily="34" charset="-122"/>
+                <a:cs typeface="Georgia" pitchFamily="34" charset="-120"/>
+              </a:rPr>
+              <a:t> offer one open question or extra problem for fast finishers.</a:t>
+            </a:r>
+            <a:endParaRPr lang="en-US" sz="1200" dirty="0"/>
+          </a:p>
+          <a:p>
+            <a:pPr algn="l" marL="342900" indent="-342900">
+              <a:lnSpc>
+                <a:spcPts val="1620"/>
+              </a:lnSpc>
+              <a:spcAft>
+                <a:spcPts val="300"/>
+              </a:spcAft>
+              <a:buSzPct val="100000"/>
+              <a:buChar char="•"/>
+            </a:pPr>
+            <a:r>
+              <a:rPr lang="en-US" sz="1200" b="1" dirty="0">
+                <a:solidFill>
+                  <a:srgbClr val="1A1A1A"/>
+                </a:solidFill>
+                <a:latin typeface="Georgia" pitchFamily="34" charset="0"/>
+                <a:ea typeface="Georgia" pitchFamily="34" charset="-122"/>
+                <a:cs typeface="Georgia" pitchFamily="34" charset="-120"/>
+              </a:rPr>
+              <a:t>Support:</a:t>
+            </a:r>
+            <a:pPr algn="l" indent="0" marL="0">
+              <a:lnSpc>
+                <a:spcPts val="1620"/>
+              </a:lnSpc>
+              <a:spcAft>
+                <a:spcPts val="300"/>
+              </a:spcAft>
+              <a:buNone/>
+            </a:pPr>
+            <a:r>
+              <a:rPr lang="en-US" sz="1200" dirty="0">
+                <a:solidFill>
+                  <a:srgbClr val="1A1A1A"/>
+                </a:solidFill>
+                <a:latin typeface="Georgia" pitchFamily="34" charset="0"/>
+                <a:ea typeface="Georgia" pitchFamily="34" charset="-122"/>
+                <a:cs typeface="Georgia" pitchFamily="34" charset="-120"/>
+              </a:rPr>
+              <a:t> pair students who need scaffolds; offer partial outlines.</a:t>
+            </a:r>
+            <a:endParaRPr lang="en-US" sz="1200" dirty="0"/>
+          </a:p>
+        </p:txBody>
+      </p:sp>
+      <p:sp>
+        <p:nvSpPr>
+          <p:cNvPr id="5" name="Text 3"/>
+          <p:cNvSpPr/>
+          <p:nvPr/>
+        </p:nvSpPr>
+        <p:spPr>
+          <a:xfrm>
+            <a:off x="406301" y="4434929"/>
+            <a:ext cx="8498026" cy="213271"/>
+          </a:xfrm>
+          <a:prstGeom prst="rect">
+            <a:avLst/>
+          </a:prstGeom>
+          <a:noFill/>
+          <a:ln/>
+        </p:spPr>
+        <p:txBody>
+          <a:bodyPr wrap="square" lIns="0" tIns="0" rIns="0" bIns="0" rtlCol="0" anchor="t"/>
+          <a:lstStyle/>
+          <a:p>
+            <a:pPr algn="l" indent="0" marL="0">
+              <a:lnSpc>
+                <a:spcPts val="1680"/>
+              </a:lnSpc>
+              <a:spcBef>
+                <a:spcPts val="300"/>
+              </a:spcBef>
+              <a:spcAft>
+                <a:spcPts val="300"/>
+              </a:spcAft>
+              <a:buNone/>
+            </a:pPr>
+            <a:r>
+              <a:rPr lang="en-US" sz="1200" dirty="0">
+                <a:solidFill>
+                  <a:srgbClr val="1A1A1A"/>
+                </a:solidFill>
+                <a:latin typeface="Georgia" pitchFamily="34" charset="0"/>
+                <a:ea typeface="Georgia" pitchFamily="34" charset="-122"/>
+                <a:cs typeface="Georgia" pitchFamily="34" charset="-120"/>
+              </a:rPr>
+              <a:t>Senior ·  · IKS Curriculum</a:t>
+            </a:r>
+            <a:endParaRPr lang="en-US" sz="1200" dirty="0"/>
+          </a:p>
+        </p:txBody>
+      </p:sp>
+    </p:spTree>
+  </p:cSld>
+  <p:clrMapOvr>
+    <a:masterClrMapping/>
+  </p:clrMapOvr>
+</p:sld>
+</file>
+
+<file path=ppt/slides/slide14.xml><?xml version="1.0" encoding="utf-8"?>
+<p:sld xmlns:a="http://schemas.openxmlformats.org/drawingml/2006/main" xmlns:r="http://schemas.openxmlformats.org/officeDocument/2006/relationships" xmlns:p="http://schemas.openxmlformats.org/presentationml/2006/main">
+  <p:cSld name="Slide 14">
+    <p:bg>
+      <p:bgPr>
+        <a:solidFill>
+          <a:srgbClr val="FAF7F2"/>
+        </a:solidFill>
+      </p:bgPr>
+    </p:bg>
+    <p:spTree>
+      <p:nvGrpSpPr>
+        <p:cNvPr id="1" name=""/>
+        <p:cNvGrpSpPr/>
+        <p:nvPr/>
+      </p:nvGrpSpPr>
+      <p:grpSpPr>
+        <a:xfrm>
+          <a:off x="0" y="0"/>
+          <a:ext cx="0" cy="0"/>
+          <a:chOff x="0" y="0"/>
+          <a:chExt cx="0" cy="0"/>
+        </a:xfrm>
+      </p:grpSpPr>
+      <p:sp>
+        <p:nvSpPr>
+          <p:cNvPr id="2" name="Text 0"/>
+          <p:cNvSpPr/>
+          <p:nvPr/>
+        </p:nvSpPr>
+        <p:spPr>
+          <a:xfrm>
+            <a:off x="0" y="0"/>
+            <a:ext cx="9144000" cy="101501"/>
+          </a:xfrm>
+          <a:prstGeom prst="rect">
+            <a:avLst/>
+          </a:prstGeom>
+          <a:solidFill>
+            <a:srgbClr val="5D1D2E"/>
+          </a:solidFill>
+          <a:ln/>
+        </p:spPr>
+        <p:txBody>
+          <a:bodyPr wrap="square" rtlCol="0" anchor="ctr"/>
+          <a:lstStyle/>
+          <a:p>
+            <a:pPr indent="0" marL="0">
+              <a:buNone/>
+            </a:pPr>
+            <a:endParaRPr lang="en-US" dirty="0"/>
+          </a:p>
+        </p:txBody>
+      </p:sp>
+      <p:sp>
+        <p:nvSpPr>
+          <p:cNvPr id="3" name="Text 1"/>
+          <p:cNvSpPr/>
+          <p:nvPr/>
+        </p:nvSpPr>
+        <p:spPr>
+          <a:xfrm>
+            <a:off x="406301" y="457051"/>
+            <a:ext cx="8498026" cy="274290"/>
+          </a:xfrm>
+          <a:prstGeom prst="rect">
+            <a:avLst/>
+          </a:prstGeom>
+          <a:noFill/>
+          <a:ln/>
+        </p:spPr>
+        <p:txBody>
+          <a:bodyPr wrap="square" lIns="0" tIns="0" rIns="0" bIns="0" rtlCol="0" anchor="t"/>
+          <a:lstStyle/>
+          <a:p>
+            <a:pPr algn="l" indent="0" marL="0">
+              <a:lnSpc>
+                <a:spcPts val="2160"/>
+              </a:lnSpc>
+              <a:spcBef>
+                <a:spcPts val="600"/>
+              </a:spcBef>
+              <a:spcAft>
+                <a:spcPts val="800"/>
+              </a:spcAft>
+              <a:buNone/>
+            </a:pPr>
+            <a:r>
+              <a:rPr lang="en-US" sz="1800" b="1" dirty="0">
+                <a:solidFill>
+                  <a:srgbClr val="997929"/>
+                </a:solidFill>
+                <a:latin typeface="Times New Roman" pitchFamily="34" charset="0"/>
+                <a:ea typeface="Times New Roman" pitchFamily="34" charset="-122"/>
+                <a:cs typeface="Times New Roman" pitchFamily="34" charset="-120"/>
+              </a:rPr>
+              <a:t>Teacher notes</a:t>
+            </a:r>
+            <a:endParaRPr lang="en-US" sz="1800" dirty="0"/>
+          </a:p>
+        </p:txBody>
+      </p:sp>
+      <p:sp>
+        <p:nvSpPr>
+          <p:cNvPr id="4" name="Text 2"/>
+          <p:cNvSpPr/>
+          <p:nvPr/>
+        </p:nvSpPr>
+        <p:spPr>
+          <a:xfrm>
+            <a:off x="634901" y="883593"/>
+            <a:ext cx="8102798" cy="731341"/>
+          </a:xfrm>
+          <a:prstGeom prst="rect">
+            <a:avLst/>
+          </a:prstGeom>
+          <a:noFill/>
+          <a:ln/>
+        </p:spPr>
+        <p:txBody>
+          <a:bodyPr wrap="square" lIns="0" tIns="0" rIns="0" bIns="0" rtlCol="0" anchor="t"/>
+          <a:lstStyle/>
+          <a:p>
+            <a:pPr algn="l" marL="342900" indent="-342900">
+              <a:lnSpc>
+                <a:spcPts val="1620"/>
+              </a:lnSpc>
+              <a:spcAft>
+                <a:spcPts val="300"/>
+              </a:spcAft>
+              <a:buSzPct val="100000"/>
+              <a:buChar char="•"/>
+            </a:pPr>
+            <a:r>
+              <a:rPr lang="en-US" sz="1200" dirty="0">
+                <a:solidFill>
+                  <a:srgbClr val="1A1A1A"/>
+                </a:solidFill>
+                <a:latin typeface="Georgia" pitchFamily="34" charset="0"/>
+                <a:ea typeface="Georgia" pitchFamily="34" charset="-122"/>
+                <a:cs typeface="Georgia" pitchFamily="34" charset="-120"/>
+              </a:rPr>
+              <a:t>Citations: at least one quoted verse with citation per module. Day 1 already includes one if applicable; you may add more.</a:t>
+            </a:r>
+            <a:endParaRPr lang="en-US" sz="1200" dirty="0"/>
+          </a:p>
+          <a:p>
+            <a:pPr algn="l" marL="342900" indent="-342900">
+              <a:lnSpc>
+                <a:spcPts val="1620"/>
+              </a:lnSpc>
+              <a:spcAft>
+                <a:spcPts val="300"/>
+              </a:spcAft>
+              <a:buSzPct val="100000"/>
+              <a:buChar char="•"/>
+            </a:pPr>
+            <a:r>
+              <a:rPr lang="en-US" sz="1200" dirty="0">
+                <a:solidFill>
+                  <a:srgbClr val="1A1A1A"/>
+                </a:solidFill>
+                <a:latin typeface="Georgia" pitchFamily="34" charset="0"/>
+                <a:ea typeface="Georgia" pitchFamily="34" charset="-122"/>
+                <a:cs typeface="Georgia" pitchFamily="34" charset="-120"/>
+              </a:rPr>
+              <a:t>Connect to prior modules where natural (especially Module 2 pañcabhūta).</a:t>
             </a:r>
             <a:endParaRPr lang="en-US" sz="1200" dirty="0"/>
           </a:p>
@@ -2725,7 +3716,7 @@
                 <a:ea typeface="Times New Roman" pitchFamily="34" charset="-122"/>
                 <a:cs typeface="Times New Roman" pitchFamily="34" charset="-120"/>
               </a:rPr>
-              <a:t>Materials</a:t>
+              <a:t>Learning objective</a:t>
             </a:r>
             <a:endParaRPr lang="en-US" sz="1800" dirty="0"/>
           </a:p>
@@ -2773,7 +3764,7 @@
                 <a:ea typeface="Georgia" pitchFamily="34" charset="-122"/>
                 <a:cs typeface="Georgia" pitchFamily="34" charset="-120"/>
               </a:rPr>
-              <a:t>– Whiteboard / chart paper – Notebook, pen per student</a:t>
+              <a:t>By the end of this lesson, students will: show how the same idea underlies binary computer subtraction.</a:t>
             </a:r>
             <a:endParaRPr lang="en-US" sz="1200" dirty="0"/>
           </a:p>
@@ -2782,52 +3773,6 @@
       <p:sp>
         <p:nvSpPr>
           <p:cNvPr id="5" name="Text 3"/>
-          <p:cNvSpPr/>
-          <p:nvPr/>
-        </p:nvSpPr>
-        <p:spPr>
-          <a:xfrm>
-            <a:off x="634901" y="1173063"/>
-            <a:ext cx="8102798" cy="281880"/>
-          </a:xfrm>
-          <a:prstGeom prst="rect">
-            <a:avLst/>
-          </a:prstGeom>
-          <a:noFill/>
-          <a:ln/>
-        </p:spPr>
-        <p:txBody>
-          <a:bodyPr wrap="square" lIns="0" tIns="0" rIns="0" bIns="0" rtlCol="0" anchor="t"/>
-          <a:lstStyle/>
-          <a:p>
-            <a:pPr algn="l" marL="342900" indent="-342900">
-              <a:lnSpc>
-                <a:spcPts val="1620"/>
-              </a:lnSpc>
-              <a:spcAft>
-                <a:spcPts val="300"/>
-              </a:spcAft>
-              <a:buSzPct val="100000"/>
-              <a:buChar char="•"/>
-            </a:pPr>
-            <a:r>
-              <a:rPr lang="en-US" sz="1200" dirty="0">
-                <a:solidFill>
-                  <a:srgbClr val="1A1A1A"/>
-                </a:solidFill>
-                <a:latin typeface="Georgia" pitchFamily="34" charset="0"/>
-                <a:ea typeface="Georgia" pitchFamily="34" charset="-122"/>
-                <a:cs typeface="Georgia" pitchFamily="34" charset="-120"/>
-              </a:rPr>
-              <a:t>(See lesson-plan.md for any day-specific materials)</a:t>
-            </a:r>
-            <a:endParaRPr lang="en-US" sz="1200" dirty="0"/>
-          </a:p>
-        </p:txBody>
-      </p:sp>
-      <p:sp>
-        <p:nvSpPr>
-          <p:cNvPr id="6" name="Text 4"/>
           <p:cNvSpPr/>
           <p:nvPr/>
         </p:nvSpPr>
@@ -2977,7 +3922,7 @@
                 <a:ea typeface="Times New Roman" pitchFamily="34" charset="-122"/>
                 <a:cs typeface="Times New Roman" pitchFamily="34" charset="-120"/>
               </a:rPr>
-              <a:t>Vocabulary introduced today</a:t>
+              <a:t>Materials</a:t>
             </a:r>
             <a:endParaRPr lang="en-US" sz="1800" dirty="0"/>
           </a:p>
@@ -2992,7 +3937,7 @@
         <p:spPr>
           <a:xfrm>
             <a:off x="634901" y="883593"/>
-            <a:ext cx="8102798" cy="281880"/>
+            <a:ext cx="8102798" cy="769441"/>
           </a:xfrm>
           <a:prstGeom prst="rect">
             <a:avLst/>
@@ -3015,24 +3960,28 @@
               <a:buChar char="•"/>
             </a:pPr>
             <a:r>
-              <a:rPr lang="en-US" sz="1200" i="1" dirty="0">
-                <a:solidFill>
-                  <a:srgbClr val="1A1A1A"/>
-                </a:solidFill>
-                <a:latin typeface="Georgia" pitchFamily="34" charset="0"/>
-                <a:ea typeface="Georgia" pitchFamily="34" charset="-122"/>
-                <a:cs typeface="Georgia" pitchFamily="34" charset="-120"/>
-              </a:rPr>
-              <a:t>Nikhilaṁ Navataścaramaṁ Daśataḥ</a:t>
-            </a:r>
-            <a:pPr algn="l" indent="0" marL="0">
+              <a:rPr lang="en-US" sz="1200" dirty="0">
+                <a:solidFill>
+                  <a:srgbClr val="1A1A1A"/>
+                </a:solidFill>
+                <a:latin typeface="Georgia" pitchFamily="34" charset="0"/>
+                <a:ea typeface="Georgia" pitchFamily="34" charset="-122"/>
+                <a:cs typeface="Georgia" pitchFamily="34" charset="-120"/>
+              </a:rPr>
+              <a:t>Whiteboard / chart paper</a:t>
+            </a:r>
+            <a:endParaRPr lang="en-US" sz="1200" dirty="0"/>
+          </a:p>
+          <a:p>
+            <a:pPr algn="l" marL="342900" indent="-342900">
               <a:lnSpc>
                 <a:spcPts val="1620"/>
               </a:lnSpc>
               <a:spcAft>
                 <a:spcPts val="300"/>
               </a:spcAft>
-              <a:buNone/>
+              <a:buSzPct val="100000"/>
+              <a:buChar char="•"/>
             </a:pPr>
             <a:r>
               <a:rPr lang="en-US" sz="1200" dirty="0">
@@ -3043,7 +3992,31 @@
                 <a:ea typeface="Georgia" pitchFamily="34" charset="-122"/>
                 <a:cs typeface="Georgia" pitchFamily="34" charset="-120"/>
               </a:rPr>
-              <a:t> (IAST: Nikhilaṁ Navataścaramaṁ Daśataḥ; lit. ""all from 9, the last from 10"")</a:t>
+              <a:t>Notebook, pen per student</a:t>
+            </a:r>
+            <a:endParaRPr lang="en-US" sz="1200" dirty="0"/>
+          </a:p>
+          <a:p>
+            <a:pPr algn="l" marL="342900" indent="-342900">
+              <a:lnSpc>
+                <a:spcPts val="1620"/>
+              </a:lnSpc>
+              <a:spcAft>
+                <a:spcPts val="300"/>
+              </a:spcAft>
+              <a:buSzPct val="100000"/>
+              <a:buChar char="•"/>
+            </a:pPr>
+            <a:r>
+              <a:rPr lang="en-US" sz="1200" dirty="0">
+                <a:solidFill>
+                  <a:srgbClr val="1A1A1A"/>
+                </a:solidFill>
+                <a:latin typeface="Georgia" pitchFamily="34" charset="0"/>
+                <a:ea typeface="Georgia" pitchFamily="34" charset="-122"/>
+                <a:cs typeface="Georgia" pitchFamily="34" charset="-120"/>
+              </a:rPr>
+              <a:t>(See lesson-plan.md for any day-specific materials)</a:t>
             </a:r>
             <a:endParaRPr lang="en-US" sz="1200" dirty="0"/>
           </a:p>
@@ -3201,7 +4174,7 @@
                 <a:ea typeface="Times New Roman" pitchFamily="34" charset="-122"/>
                 <a:cs typeface="Times New Roman" pitchFamily="34" charset="-120"/>
               </a:rPr>
-              <a:t>Lesson flow</a:t>
+              <a:t>Vocabulary introduced today</a:t>
             </a:r>
             <a:endParaRPr lang="en-US" sz="1800" dirty="0"/>
           </a:p>
@@ -3210,6 +4183,72 @@
       <p:sp>
         <p:nvSpPr>
           <p:cNvPr id="4" name="Text 2"/>
+          <p:cNvSpPr/>
+          <p:nvPr/>
+        </p:nvSpPr>
+        <p:spPr>
+          <a:xfrm>
+            <a:off x="634901" y="883593"/>
+            <a:ext cx="8102798" cy="281880"/>
+          </a:xfrm>
+          <a:prstGeom prst="rect">
+            <a:avLst/>
+          </a:prstGeom>
+          <a:noFill/>
+          <a:ln/>
+        </p:spPr>
+        <p:txBody>
+          <a:bodyPr wrap="square" lIns="0" tIns="0" rIns="0" bIns="0" rtlCol="0" anchor="t"/>
+          <a:lstStyle/>
+          <a:p>
+            <a:pPr algn="l" marL="342900" indent="-342900">
+              <a:lnSpc>
+                <a:spcPts val="1620"/>
+              </a:lnSpc>
+              <a:spcAft>
+                <a:spcPts val="300"/>
+              </a:spcAft>
+              <a:buSzPct val="100000"/>
+              <a:buChar char="•"/>
+            </a:pPr>
+            <a:r>
+              <a:rPr lang="en-US" sz="1200" i="1" dirty="0">
+                <a:solidFill>
+                  <a:srgbClr val="1A1A1A"/>
+                </a:solidFill>
+                <a:latin typeface="Georgia" pitchFamily="34" charset="0"/>
+                <a:ea typeface="Georgia" pitchFamily="34" charset="-122"/>
+                <a:cs typeface="Georgia" pitchFamily="34" charset="-120"/>
+              </a:rPr>
+              <a:t>Nikhilaṁ Navataścaramaṁ Daśataḥ</a:t>
+            </a:r>
+            <a:pPr algn="l" indent="0" marL="0">
+              <a:lnSpc>
+                <a:spcPts val="1620"/>
+              </a:lnSpc>
+              <a:spcAft>
+                <a:spcPts val="300"/>
+              </a:spcAft>
+              <a:buNone/>
+            </a:pPr>
+            <a:r>
+              <a:rPr lang="en-US" sz="1200" dirty="0">
+                <a:solidFill>
+                  <a:srgbClr val="1A1A1A"/>
+                </a:solidFill>
+                <a:latin typeface="Georgia" pitchFamily="34" charset="0"/>
+                <a:ea typeface="Georgia" pitchFamily="34" charset="-122"/>
+                <a:cs typeface="Georgia" pitchFamily="34" charset="-120"/>
+              </a:rPr>
+              <a:t> (IAST: Nikhilaṁ Navataścaramaṁ Daśataḥ; lit. ""all from 9, the last from 10"")</a:t>
+            </a:r>
+            <a:endParaRPr lang="en-US" sz="1200" dirty="0"/>
+          </a:p>
+        </p:txBody>
+      </p:sp>
+      <p:sp>
+        <p:nvSpPr>
+          <p:cNvPr id="5" name="Text 3"/>
           <p:cNvSpPr/>
           <p:nvPr/>
         </p:nvSpPr>
@@ -3359,7 +4398,7 @@
                 <a:ea typeface="Times New Roman" pitchFamily="34" charset="-122"/>
                 <a:cs typeface="Times New Roman" pitchFamily="34" charset="-120"/>
               </a:rPr>
-              <a:t>Warm-up (5 min)</a:t>
+              <a:t>Lesson flow</a:t>
             </a:r>
             <a:endParaRPr lang="en-US" sz="1800" dirty="0"/>
           </a:p>
@@ -3368,100 +4407,6 @@
       <p:sp>
         <p:nvSpPr>
           <p:cNvPr id="4" name="Text 2"/>
-          <p:cNvSpPr/>
-          <p:nvPr/>
-        </p:nvSpPr>
-        <p:spPr>
-          <a:xfrm>
-            <a:off x="406301" y="870942"/>
-            <a:ext cx="8498026" cy="426541"/>
-          </a:xfrm>
-          <a:prstGeom prst="rect">
-            <a:avLst/>
-          </a:prstGeom>
-          <a:noFill/>
-          <a:ln/>
-        </p:spPr>
-        <p:txBody>
-          <a:bodyPr wrap="square" lIns="0" tIns="0" rIns="0" bIns="0" rtlCol="0" anchor="t"/>
-          <a:lstStyle/>
-          <a:p>
-            <a:pPr algn="l" indent="0" marL="0">
-              <a:lnSpc>
-                <a:spcPts val="1680"/>
-              </a:lnSpc>
-              <a:spcBef>
-                <a:spcPts val="300"/>
-              </a:spcBef>
-              <a:spcAft>
-                <a:spcPts val="300"/>
-              </a:spcAft>
-              <a:buNone/>
-            </a:pPr>
-            <a:r>
-              <a:rPr lang="en-US" sz="1200" dirty="0">
-                <a:solidFill>
-                  <a:srgbClr val="1A1A1A"/>
-                </a:solidFill>
-                <a:latin typeface="Georgia" pitchFamily="34" charset="0"/>
-                <a:ea typeface="Georgia" pitchFamily="34" charset="-122"/>
-                <a:cs typeface="Georgia" pitchFamily="34" charset="-120"/>
-              </a:rPr>
-              <a:t>– Daily check-in: one-sentence response to </a:t>
-            </a:r>
-            <a:pPr algn="l" indent="0" marL="0">
-              <a:lnSpc>
-                <a:spcPts val="1680"/>
-              </a:lnSpc>
-              <a:spcBef>
-                <a:spcPts val="300"/>
-              </a:spcBef>
-              <a:spcAft>
-                <a:spcPts val="300"/>
-              </a:spcAft>
-              <a:buNone/>
-            </a:pPr>
-            <a:r>
-              <a:rPr lang="en-US" sz="1200" i="1" dirty="0">
-                <a:solidFill>
-                  <a:srgbClr val="1A1A1A"/>
-                </a:solidFill>
-                <a:latin typeface="Georgia" pitchFamily="34" charset="0"/>
-                <a:ea typeface="Georgia" pitchFamily="34" charset="-122"/>
-                <a:cs typeface="Georgia" pitchFamily="34" charset="-120"/>
-              </a:rPr>
-              <a:t>"What's one thing you remember about yesterday's lesson?"</a:t>
-            </a:r>
-            <a:pPr algn="l" indent="0" marL="0">
-              <a:lnSpc>
-                <a:spcPts val="1680"/>
-              </a:lnSpc>
-              <a:spcBef>
-                <a:spcPts val="300"/>
-              </a:spcBef>
-              <a:spcAft>
-                <a:spcPts val="300"/>
-              </a:spcAft>
-              <a:buNone/>
-            </a:pPr>
-            <a:r>
-              <a:rPr lang="en-US" sz="1200" dirty="0">
-                <a:solidFill>
-                  <a:srgbClr val="1A1A1A"/>
-                </a:solidFill>
-                <a:latin typeface="Georgia" pitchFamily="34" charset="0"/>
-                <a:ea typeface="Georgia" pitchFamily="34" charset="-122"/>
-                <a:cs typeface="Georgia" pitchFamily="34" charset="-120"/>
-              </a:rPr>
-              <a:t> – Hook: introduce a phenomenon or question that motivates today's concept.</a:t>
-            </a:r>
-            <a:endParaRPr lang="en-US" sz="1200" dirty="0"/>
-          </a:p>
-        </p:txBody>
-      </p:sp>
-      <p:sp>
-        <p:nvSpPr>
-          <p:cNvPr id="5" name="Text 3"/>
           <p:cNvSpPr/>
           <p:nvPr/>
         </p:nvSpPr>
@@ -3611,7 +4556,7 @@
                 <a:ea typeface="Times New Roman" pitchFamily="34" charset="-122"/>
                 <a:cs typeface="Times New Roman" pitchFamily="34" charset="-120"/>
               </a:rPr>
-              <a:t>Core (20 min)</a:t>
+              <a:t>Warm-up (5 min)</a:t>
             </a:r>
             <a:endParaRPr lang="en-US" sz="1800" dirty="0"/>
           </a:p>
@@ -3626,7 +4571,7 @@
         <p:spPr>
           <a:xfrm>
             <a:off x="634901" y="883593"/>
-            <a:ext cx="8102798" cy="487561"/>
+            <a:ext cx="8102798" cy="525661"/>
           </a:xfrm>
           <a:prstGeom prst="rect">
             <a:avLst/>
@@ -3649,15 +4594,15 @@
               <a:buChar char="•"/>
             </a:pPr>
             <a:r>
-              <a:rPr lang="en-US" sz="1200" b="1" dirty="0">
-                <a:solidFill>
-                  <a:srgbClr val="1A1A1A"/>
-                </a:solidFill>
-                <a:latin typeface="Georgia" pitchFamily="34" charset="0"/>
-                <a:ea typeface="Georgia" pitchFamily="34" charset="-122"/>
-                <a:cs typeface="Georgia" pitchFamily="34" charset="-120"/>
-              </a:rPr>
-              <a:t>Bridge to computing.</a:t>
+              <a:rPr lang="en-US" sz="1200" dirty="0">
+                <a:solidFill>
+                  <a:srgbClr val="1A1A1A"/>
+                </a:solidFill>
+                <a:latin typeface="Georgia" pitchFamily="34" charset="0"/>
+                <a:ea typeface="Georgia" pitchFamily="34" charset="-122"/>
+                <a:cs typeface="Georgia" pitchFamily="34" charset="-120"/>
+              </a:rPr>
+              <a:t>Daily check-in: one-sentence response to </a:t>
             </a:r>
             <a:pPr algn="l" indent="0" marL="0">
               <a:lnSpc>
@@ -3669,6 +4614,30 @@
               <a:buNone/>
             </a:pPr>
             <a:r>
+              <a:rPr lang="en-US" sz="1200" i="1" dirty="0">
+                <a:solidFill>
+                  <a:srgbClr val="1A1A1A"/>
+                </a:solidFill>
+                <a:latin typeface="Georgia" pitchFamily="34" charset="0"/>
+                <a:ea typeface="Georgia" pitchFamily="34" charset="-122"/>
+                <a:cs typeface="Georgia" pitchFamily="34" charset="-120"/>
+              </a:rPr>
+              <a:t>"What's one thing you remember about yesterday's lesson?"</a:t>
+            </a:r>
+            <a:endParaRPr lang="en-US" sz="1200" dirty="0"/>
+          </a:p>
+          <a:p>
+            <a:pPr algn="l" marL="342900" indent="-342900">
+              <a:lnSpc>
+                <a:spcPts val="1620"/>
+              </a:lnSpc>
+              <a:spcAft>
+                <a:spcPts val="300"/>
+              </a:spcAft>
+              <a:buSzPct val="100000"/>
+              <a:buChar char="•"/>
+            </a:pPr>
+            <a:r>
               <a:rPr lang="en-US" sz="1200" dirty="0">
                 <a:solidFill>
                   <a:srgbClr val="1A1A1A"/>
@@ -3677,47 +4646,7 @@
                 <a:ea typeface="Georgia" pitchFamily="34" charset="-122"/>
                 <a:cs typeface="Georgia" pitchFamily="34" charset="-120"/>
               </a:rPr>
-              <a:t> Modern computers don't have a subtraction circuit — they have an ADDER circuit. They subtract by adding the </a:t>
-            </a:r>
-            <a:pPr algn="l" indent="0" marL="0">
-              <a:lnSpc>
-                <a:spcPts val="1620"/>
-              </a:lnSpc>
-              <a:spcAft>
-                <a:spcPts val="300"/>
-              </a:spcAft>
-              <a:buNone/>
-            </a:pPr>
-            <a:r>
-              <a:rPr lang="en-US" sz="1200" i="1" dirty="0">
-                <a:solidFill>
-                  <a:srgbClr val="1A1A1A"/>
-                </a:solidFill>
-                <a:latin typeface="Georgia" pitchFamily="34" charset="0"/>
-                <a:ea typeface="Georgia" pitchFamily="34" charset="-122"/>
-                <a:cs typeface="Georgia" pitchFamily="34" charset="-120"/>
-              </a:rPr>
-              <a:t>two's complement</a:t>
-            </a:r>
-            <a:pPr algn="l" indent="0" marL="0">
-              <a:lnSpc>
-                <a:spcPts val="1620"/>
-              </a:lnSpc>
-              <a:spcAft>
-                <a:spcPts val="300"/>
-              </a:spcAft>
-              <a:buNone/>
-            </a:pPr>
-            <a:r>
-              <a:rPr lang="en-US" sz="1200" dirty="0">
-                <a:solidFill>
-                  <a:srgbClr val="1A1A1A"/>
-                </a:solidFill>
-                <a:latin typeface="Georgia" pitchFamily="34" charset="0"/>
-                <a:ea typeface="Georgia" pitchFamily="34" charset="-122"/>
-                <a:cs typeface="Georgia" pitchFamily="34" charset="-120"/>
-              </a:rPr>
-              <a:t> of the subtrahend. This is the same Nikhilam idea, in binary.</a:t>
+              <a:t>Hook: introduce a phenomenon or question that motivates today's concept.</a:t>
             </a:r>
             <a:endParaRPr lang="en-US" sz="1200" dirty="0"/>
           </a:p>
@@ -3731,427 +4660,7 @@
         </p:nvSpPr>
         <p:spPr>
           <a:xfrm>
-            <a:off x="634901" y="1472654"/>
-            <a:ext cx="8102798" cy="281880"/>
-          </a:xfrm>
-          <a:prstGeom prst="rect">
-            <a:avLst/>
-          </a:prstGeom>
-          <a:noFill/>
-          <a:ln/>
-        </p:spPr>
-        <p:txBody>
-          <a:bodyPr wrap="square" lIns="0" tIns="0" rIns="0" bIns="0" rtlCol="0" anchor="t"/>
-          <a:lstStyle/>
-          <a:p>
-            <a:pPr algn="l" marL="342900" indent="-342900">
-              <a:lnSpc>
-                <a:spcPts val="1620"/>
-              </a:lnSpc>
-              <a:spcAft>
-                <a:spcPts val="300"/>
-              </a:spcAft>
-              <a:buSzPct val="100000"/>
-              <a:buChar char="•"/>
-            </a:pPr>
-            <a:r>
-              <a:rPr lang="en-US" sz="1200" b="1" dirty="0">
-                <a:solidFill>
-                  <a:srgbClr val="1A1A1A"/>
-                </a:solidFill>
-                <a:latin typeface="Georgia" pitchFamily="34" charset="0"/>
-                <a:ea typeface="Georgia" pitchFamily="34" charset="-122"/>
-                <a:cs typeface="Georgia" pitchFamily="34" charset="-120"/>
-              </a:rPr>
-              <a:t>Binary Nikhilam.</a:t>
-            </a:r>
-            <a:pPr algn="l" indent="0" marL="0">
-              <a:lnSpc>
-                <a:spcPts val="1620"/>
-              </a:lnSpc>
-              <a:spcAft>
-                <a:spcPts val="300"/>
-              </a:spcAft>
-              <a:buNone/>
-            </a:pPr>
-            <a:r>
-              <a:rPr lang="en-US" sz="1200" dirty="0">
-                <a:solidFill>
-                  <a:srgbClr val="1A1A1A"/>
-                </a:solidFill>
-                <a:latin typeface="Georgia" pitchFamily="34" charset="0"/>
-                <a:ea typeface="Georgia" pitchFamily="34" charset="-122"/>
-                <a:cs typeface="Georgia" pitchFamily="34" charset="-120"/>
-              </a:rPr>
-              <a:t> For an 8-bit number:</a:t>
-            </a:r>
-            <a:endParaRPr lang="en-US" sz="1200" dirty="0"/>
-          </a:p>
-        </p:txBody>
-      </p:sp>
-      <p:sp>
-        <p:nvSpPr>
-          <p:cNvPr id="6" name="Text 4"/>
-          <p:cNvSpPr/>
-          <p:nvPr/>
-        </p:nvSpPr>
-        <p:spPr>
-          <a:xfrm>
-            <a:off x="406301" y="1843385"/>
-            <a:ext cx="8498026" cy="426541"/>
-          </a:xfrm>
-          <a:prstGeom prst="rect">
-            <a:avLst/>
-          </a:prstGeom>
-          <a:noFill/>
-          <a:ln/>
-        </p:spPr>
-        <p:txBody>
-          <a:bodyPr wrap="square" lIns="0" tIns="0" rIns="0" bIns="0" rtlCol="0" anchor="t"/>
-          <a:lstStyle/>
-          <a:p>
-            <a:pPr algn="l" indent="0" marL="0">
-              <a:lnSpc>
-                <a:spcPts val="1680"/>
-              </a:lnSpc>
-              <a:spcBef>
-                <a:spcPts val="300"/>
-              </a:spcBef>
-              <a:spcAft>
-                <a:spcPts val="300"/>
-              </a:spcAft>
-              <a:buNone/>
-            </a:pPr>
-            <a:r>
-              <a:rPr lang="en-US" sz="1200" dirty="0">
-                <a:solidFill>
-                  <a:srgbClr val="1A1A1A"/>
-                </a:solidFill>
-                <a:latin typeface="Georgia" pitchFamily="34" charset="0"/>
-                <a:ea typeface="Georgia" pitchFamily="34" charset="-122"/>
-                <a:cs typeface="Georgia" pitchFamily="34" charset="-120"/>
-              </a:rPr>
-              <a:t>– One's complement: flip every bit (= "all from 1," the binary analogue of "all from 9").    – Two's complement: one's complement + 1.</a:t>
-            </a:r>
-            <a:endParaRPr lang="en-US" sz="1200" dirty="0"/>
-          </a:p>
-        </p:txBody>
-      </p:sp>
-      <p:sp>
-        <p:nvSpPr>
-          <p:cNvPr id="7" name="Text 5"/>
-          <p:cNvSpPr/>
-          <p:nvPr/>
-        </p:nvSpPr>
-        <p:spPr>
-          <a:xfrm>
-            <a:off x="634901" y="2358777"/>
-            <a:ext cx="8102798" cy="281880"/>
-          </a:xfrm>
-          <a:prstGeom prst="rect">
-            <a:avLst/>
-          </a:prstGeom>
-          <a:noFill/>
-          <a:ln/>
-        </p:spPr>
-        <p:txBody>
-          <a:bodyPr wrap="square" lIns="0" tIns="0" rIns="0" bIns="0" rtlCol="0" anchor="t"/>
-          <a:lstStyle/>
-          <a:p>
-            <a:pPr algn="l" marL="342900" indent="-342900">
-              <a:lnSpc>
-                <a:spcPts val="1620"/>
-              </a:lnSpc>
-              <a:spcAft>
-                <a:spcPts val="300"/>
-              </a:spcAft>
-              <a:buSzPct val="100000"/>
-              <a:buChar char="•"/>
-            </a:pPr>
-            <a:r>
-              <a:rPr lang="en-US" sz="1200" b="1" dirty="0">
-                <a:solidFill>
-                  <a:srgbClr val="1A1A1A"/>
-                </a:solidFill>
-                <a:latin typeface="Georgia" pitchFamily="34" charset="0"/>
-                <a:ea typeface="Georgia" pitchFamily="34" charset="-122"/>
-                <a:cs typeface="Georgia" pitchFamily="34" charset="-120"/>
-              </a:rPr>
-              <a:t>Worked example.</a:t>
-            </a:r>
-            <a:pPr algn="l" indent="0" marL="0">
-              <a:lnSpc>
-                <a:spcPts val="1620"/>
-              </a:lnSpc>
-              <a:spcAft>
-                <a:spcPts val="300"/>
-              </a:spcAft>
-              <a:buNone/>
-            </a:pPr>
-            <a:r>
-              <a:rPr lang="en-US" sz="1200" dirty="0">
-                <a:solidFill>
-                  <a:srgbClr val="1A1A1A"/>
-                </a:solidFill>
-                <a:latin typeface="Georgia" pitchFamily="34" charset="0"/>
-                <a:ea typeface="Georgia" pitchFamily="34" charset="-122"/>
-                <a:cs typeface="Georgia" pitchFamily="34" charset="-120"/>
-              </a:rPr>
-              <a:t> Compute 9 − 5 in 8-bit binary:</a:t>
-            </a:r>
-            <a:endParaRPr lang="en-US" sz="1200" dirty="0"/>
-          </a:p>
-        </p:txBody>
-      </p:sp>
-      <p:sp>
-        <p:nvSpPr>
-          <p:cNvPr id="8" name="Text 6"/>
-          <p:cNvSpPr/>
-          <p:nvPr/>
-        </p:nvSpPr>
-        <p:spPr>
-          <a:xfrm>
-            <a:off x="406301" y="2729508"/>
-            <a:ext cx="8498026" cy="426541"/>
-          </a:xfrm>
-          <a:prstGeom prst="rect">
-            <a:avLst/>
-          </a:prstGeom>
-          <a:noFill/>
-          <a:ln/>
-        </p:spPr>
-        <p:txBody>
-          <a:bodyPr wrap="square" lIns="0" tIns="0" rIns="0" bIns="0" rtlCol="0" anchor="t"/>
-          <a:lstStyle/>
-          <a:p>
-            <a:pPr algn="l" indent="0" marL="0">
-              <a:lnSpc>
-                <a:spcPts val="1680"/>
-              </a:lnSpc>
-              <a:spcBef>
-                <a:spcPts val="300"/>
-              </a:spcBef>
-              <a:spcAft>
-                <a:spcPts val="300"/>
-              </a:spcAft>
-              <a:buNone/>
-            </a:pPr>
-            <a:r>
-              <a:rPr lang="en-US" sz="1200" dirty="0">
-                <a:solidFill>
-                  <a:srgbClr val="1A1A1A"/>
-                </a:solidFill>
-                <a:latin typeface="Georgia" pitchFamily="34" charset="0"/>
-                <a:ea typeface="Georgia" pitchFamily="34" charset="-122"/>
-                <a:cs typeface="Georgia" pitchFamily="34" charset="-120"/>
-              </a:rPr>
-              <a:t>– 5 = 00000101    – Flip: 11111010 (one's complement)    – Add 1: 11111011 (two's complement)    – Add to 9 = 00001001: 00001001 + 11111011 = 100000100, drop the overflow bit → 00000100 = 4. ✓</a:t>
-            </a:r>
-            <a:endParaRPr lang="en-US" sz="1200" dirty="0"/>
-          </a:p>
-        </p:txBody>
-      </p:sp>
-      <p:sp>
-        <p:nvSpPr>
-          <p:cNvPr id="9" name="Text 7"/>
-          <p:cNvSpPr/>
-          <p:nvPr/>
-        </p:nvSpPr>
-        <p:spPr>
-          <a:xfrm>
-            <a:off x="634901" y="3244900"/>
-            <a:ext cx="8102798" cy="281880"/>
-          </a:xfrm>
-          <a:prstGeom prst="rect">
-            <a:avLst/>
-          </a:prstGeom>
-          <a:noFill/>
-          <a:ln/>
-        </p:spPr>
-        <p:txBody>
-          <a:bodyPr wrap="square" lIns="0" tIns="0" rIns="0" bIns="0" rtlCol="0" anchor="t"/>
-          <a:lstStyle/>
-          <a:p>
-            <a:pPr algn="l" marL="342900" indent="-342900">
-              <a:lnSpc>
-                <a:spcPts val="1620"/>
-              </a:lnSpc>
-              <a:spcAft>
-                <a:spcPts val="300"/>
-              </a:spcAft>
-              <a:buSzPct val="100000"/>
-              <a:buChar char="•"/>
-            </a:pPr>
-            <a:r>
-              <a:rPr lang="en-US" sz="1200" b="1" dirty="0">
-                <a:solidFill>
-                  <a:srgbClr val="1A1A1A"/>
-                </a:solidFill>
-                <a:latin typeface="Georgia" pitchFamily="34" charset="0"/>
-                <a:ea typeface="Georgia" pitchFamily="34" charset="-122"/>
-                <a:cs typeface="Georgia" pitchFamily="34" charset="-120"/>
-              </a:rPr>
-              <a:t>Source.</a:t>
-            </a:r>
-            <a:pPr algn="l" indent="0" marL="0">
-              <a:lnSpc>
-                <a:spcPts val="1620"/>
-              </a:lnSpc>
-              <a:spcAft>
-                <a:spcPts val="300"/>
-              </a:spcAft>
-              <a:buNone/>
-            </a:pPr>
-            <a:r>
-              <a:rPr lang="en-US" sz="1200" dirty="0">
-                <a:solidFill>
-                  <a:srgbClr val="1A1A1A"/>
-                </a:solidFill>
-                <a:latin typeface="Georgia" pitchFamily="34" charset="0"/>
-                <a:ea typeface="Georgia" pitchFamily="34" charset="-122"/>
-                <a:cs typeface="Georgia" pitchFamily="34" charset="-120"/>
-              </a:rPr>
-              <a:t> D.E. Knuth, </a:t>
-            </a:r>
-            <a:pPr algn="l" indent="0" marL="0">
-              <a:lnSpc>
-                <a:spcPts val="1620"/>
-              </a:lnSpc>
-              <a:spcAft>
-                <a:spcPts val="300"/>
-              </a:spcAft>
-              <a:buNone/>
-            </a:pPr>
-            <a:r>
-              <a:rPr lang="en-US" sz="1200" i="1" dirty="0">
-                <a:solidFill>
-                  <a:srgbClr val="1A1A1A"/>
-                </a:solidFill>
-                <a:latin typeface="Georgia" pitchFamily="34" charset="0"/>
-                <a:ea typeface="Georgia" pitchFamily="34" charset="-122"/>
-                <a:cs typeface="Georgia" pitchFamily="34" charset="-120"/>
-              </a:rPr>
-              <a:t>The Art of Computer Programming</a:t>
-            </a:r>
-            <a:pPr algn="l" indent="0" marL="0">
-              <a:lnSpc>
-                <a:spcPts val="1620"/>
-              </a:lnSpc>
-              <a:spcAft>
-                <a:spcPts val="300"/>
-              </a:spcAft>
-              <a:buNone/>
-            </a:pPr>
-            <a:r>
-              <a:rPr lang="en-US" sz="1200" dirty="0">
-                <a:solidFill>
-                  <a:srgbClr val="1A1A1A"/>
-                </a:solidFill>
-                <a:latin typeface="Georgia" pitchFamily="34" charset="0"/>
-                <a:ea typeface="Georgia" pitchFamily="34" charset="-122"/>
-                <a:cs typeface="Georgia" pitchFamily="34" charset="-120"/>
-              </a:rPr>
-              <a:t>, vol. 2 — full treatment.</a:t>
-            </a:r>
-            <a:endParaRPr lang="en-US" sz="1200" dirty="0"/>
-          </a:p>
-        </p:txBody>
-      </p:sp>
-      <p:sp>
-        <p:nvSpPr>
-          <p:cNvPr id="10" name="Text 8"/>
-          <p:cNvSpPr/>
-          <p:nvPr/>
-        </p:nvSpPr>
-        <p:spPr>
-          <a:xfrm>
-            <a:off x="634901" y="3628281"/>
-            <a:ext cx="8102798" cy="693241"/>
-          </a:xfrm>
-          <a:prstGeom prst="rect">
-            <a:avLst/>
-          </a:prstGeom>
-          <a:noFill/>
-          <a:ln/>
-        </p:spPr>
-        <p:txBody>
-          <a:bodyPr wrap="square" lIns="0" tIns="0" rIns="0" bIns="0" rtlCol="0" anchor="t"/>
-          <a:lstStyle/>
-          <a:p>
-            <a:pPr algn="l" marL="342900" indent="-342900">
-              <a:lnSpc>
-                <a:spcPts val="1620"/>
-              </a:lnSpc>
-              <a:spcAft>
-                <a:spcPts val="300"/>
-              </a:spcAft>
-              <a:buSzPct val="100000"/>
-              <a:buChar char="•"/>
-            </a:pPr>
-            <a:r>
-              <a:rPr lang="en-US" sz="1200" b="1" dirty="0">
-                <a:solidFill>
-                  <a:srgbClr val="1A1A1A"/>
-                </a:solidFill>
-                <a:latin typeface="Georgia" pitchFamily="34" charset="0"/>
-                <a:ea typeface="Georgia" pitchFamily="34" charset="-122"/>
-                <a:cs typeface="Georgia" pitchFamily="34" charset="-120"/>
-              </a:rPr>
-              <a:t>Critical-thinking close.</a:t>
-            </a:r>
-            <a:pPr algn="l" indent="0" marL="0">
-              <a:lnSpc>
-                <a:spcPts val="1620"/>
-              </a:lnSpc>
-              <a:spcAft>
-                <a:spcPts val="300"/>
-              </a:spcAft>
-              <a:buNone/>
-            </a:pPr>
-            <a:r>
-              <a:rPr lang="en-US" sz="1200" dirty="0">
-                <a:solidFill>
-                  <a:srgbClr val="1A1A1A"/>
-                </a:solidFill>
-                <a:latin typeface="Georgia" pitchFamily="34" charset="0"/>
-                <a:ea typeface="Georgia" pitchFamily="34" charset="-122"/>
-                <a:cs typeface="Georgia" pitchFamily="34" charset="-120"/>
-              </a:rPr>
-              <a:t> </a:t>
-            </a:r>
-            <a:pPr algn="l" indent="0" marL="0">
-              <a:lnSpc>
-                <a:spcPts val="1620"/>
-              </a:lnSpc>
-              <a:spcAft>
-                <a:spcPts val="300"/>
-              </a:spcAft>
-              <a:buNone/>
-            </a:pPr>
-            <a:r>
-              <a:rPr lang="en-US" sz="1200" i="1" dirty="0">
-                <a:solidFill>
-                  <a:srgbClr val="1A1A1A"/>
-                </a:solidFill>
-                <a:latin typeface="Georgia" pitchFamily="34" charset="0"/>
-                <a:ea typeface="Georgia" pitchFamily="34" charset="-122"/>
-                <a:cs typeface="Georgia" pitchFamily="34" charset="-120"/>
-              </a:rPr>
-              <a:t>"The Nikhilam sūtra (or its decimal-complement principle) and binary two's complement both date their origins to vastly different traditions and eras. What does this tell us about (a) the universality of certain algorithmic ideas and (b) the limits of cultural-priority claims?"</a:t>
-            </a:r>
-            <a:endParaRPr lang="en-US" sz="1200" dirty="0"/>
-          </a:p>
-        </p:txBody>
-      </p:sp>
-      <p:sp>
-        <p:nvSpPr>
-          <p:cNvPr id="11" name="Text 9"/>
-          <p:cNvSpPr/>
-          <p:nvPr/>
-        </p:nvSpPr>
-        <p:spPr>
-          <a:xfrm>
-            <a:off x="406301" y="4486573"/>
+            <a:off x="406301" y="4434929"/>
             <a:ext cx="8498026" cy="213271"/>
           </a:xfrm>
           <a:prstGeom prst="rect">
@@ -4295,7 +4804,7 @@
                 <a:ea typeface="Times New Roman" pitchFamily="34" charset="-122"/>
                 <a:cs typeface="Times New Roman" pitchFamily="34" charset="-120"/>
               </a:rPr>
-              <a:t>Activity (15 min)</a:t>
+              <a:t>Core (20 min)</a:t>
             </a:r>
             <a:endParaRPr lang="en-US" sz="1800" dirty="0"/>
           </a:p>
@@ -4309,8 +4818,8 @@
         </p:nvSpPr>
         <p:spPr>
           <a:xfrm>
-            <a:off x="406301" y="870942"/>
-            <a:ext cx="8498026" cy="436066"/>
+            <a:off x="634901" y="883593"/>
+            <a:ext cx="8102798" cy="487561"/>
           </a:xfrm>
           <a:prstGeom prst="rect">
             <a:avLst/>
@@ -4322,13 +4831,31 @@
           <a:bodyPr wrap="square" lIns="0" tIns="0" rIns="0" bIns="0" rtlCol="0" anchor="t"/>
           <a:lstStyle/>
           <a:p>
+            <a:pPr algn="l" marL="342900" indent="-342900">
+              <a:lnSpc>
+                <a:spcPts val="1620"/>
+              </a:lnSpc>
+              <a:spcAft>
+                <a:spcPts val="300"/>
+              </a:spcAft>
+              <a:buSzPct val="100000"/>
+              <a:buChar char="•"/>
+            </a:pPr>
+            <a:r>
+              <a:rPr lang="en-US" sz="1200" b="1" dirty="0">
+                <a:solidFill>
+                  <a:srgbClr val="1A1A1A"/>
+                </a:solidFill>
+                <a:latin typeface="Georgia" pitchFamily="34" charset="0"/>
+                <a:ea typeface="Georgia" pitchFamily="34" charset="-122"/>
+                <a:cs typeface="Georgia" pitchFamily="34" charset="-120"/>
+              </a:rPr>
+              <a:t>Bridge to computing.</a:t>
+            </a:r>
             <a:pPr algn="l" indent="0" marL="0">
               <a:lnSpc>
-                <a:spcPts val="1680"/>
-              </a:lnSpc>
-              <a:spcBef>
-                <a:spcPts val="300"/>
-              </a:spcBef>
+                <a:spcPts val="1620"/>
+              </a:lnSpc>
               <a:spcAft>
                 <a:spcPts val="300"/>
               </a:spcAft>
@@ -4343,15 +4870,12 @@
                 <a:ea typeface="Georgia" pitchFamily="34" charset="-122"/>
                 <a:cs typeface="Georgia" pitchFamily="34" charset="-120"/>
               </a:rPr>
-              <a:t>A scaled version of </a:t>
+              <a:t> Modern computers don't have a subtraction circuit — they have an ADDER circuit. They subtract by adding the </a:t>
             </a:r>
             <a:pPr algn="l" indent="0" marL="0">
               <a:lnSpc>
-                <a:spcPts val="1680"/>
-              </a:lnSpc>
-              <a:spcBef>
-                <a:spcPts val="300"/>
-              </a:spcBef>
+                <a:spcPts val="1620"/>
+              </a:lnSpc>
               <a:spcAft>
                 <a:spcPts val="300"/>
               </a:spcAft>
@@ -4366,15 +4890,12 @@
                 <a:ea typeface="Georgia" pitchFamily="34" charset="-122"/>
                 <a:cs typeface="Georgia" pitchFamily="34" charset="-120"/>
               </a:rPr>
-              <a:t>Complement Flashcards</a:t>
+              <a:t>two's complement</a:t>
             </a:r>
             <a:pPr algn="l" indent="0" marL="0">
               <a:lnSpc>
-                <a:spcPts val="1680"/>
-              </a:lnSpc>
-              <a:spcBef>
-                <a:spcPts val="300"/>
-              </a:spcBef>
+                <a:spcPts val="1620"/>
+              </a:lnSpc>
               <a:spcAft>
                 <a:spcPts val="300"/>
               </a:spcAft>
@@ -4389,15 +4910,58 @@
                 <a:ea typeface="Georgia" pitchFamily="34" charset="-122"/>
                 <a:cs typeface="Georgia" pitchFamily="34" charset="-120"/>
               </a:rPr>
-              <a:t> (see </a:t>
+              <a:t> of the subtrahend. This is the same Nikhilam idea, in binary.</a:t>
+            </a:r>
+            <a:endParaRPr lang="en-US" sz="1200" dirty="0"/>
+          </a:p>
+        </p:txBody>
+      </p:sp>
+      <p:sp>
+        <p:nvSpPr>
+          <p:cNvPr id="5" name="Text 3"/>
+          <p:cNvSpPr/>
+          <p:nvPr/>
+        </p:nvSpPr>
+        <p:spPr>
+          <a:xfrm>
+            <a:off x="634901" y="1472654"/>
+            <a:ext cx="8102798" cy="281880"/>
+          </a:xfrm>
+          <a:prstGeom prst="rect">
+            <a:avLst/>
+          </a:prstGeom>
+          <a:noFill/>
+          <a:ln/>
+        </p:spPr>
+        <p:txBody>
+          <a:bodyPr wrap="square" lIns="0" tIns="0" rIns="0" bIns="0" rtlCol="0" anchor="t"/>
+          <a:lstStyle/>
+          <a:p>
+            <a:pPr algn="l" marL="342900" indent="-342900">
+              <a:lnSpc>
+                <a:spcPts val="1620"/>
+              </a:lnSpc>
+              <a:spcAft>
+                <a:spcPts val="300"/>
+              </a:spcAft>
+              <a:buSzPct val="100000"/>
+              <a:buChar char="•"/>
+            </a:pPr>
+            <a:r>
+              <a:rPr lang="en-US" sz="1200" b="1" dirty="0">
+                <a:solidFill>
+                  <a:srgbClr val="1A1A1A"/>
+                </a:solidFill>
+                <a:latin typeface="Georgia" pitchFamily="34" charset="0"/>
+                <a:ea typeface="Georgia" pitchFamily="34" charset="-122"/>
+                <a:cs typeface="Georgia" pitchFamily="34" charset="-120"/>
+              </a:rPr>
+              <a:t>Binary Nikhilam.</a:t>
             </a:r>
             <a:pPr algn="l" indent="0" marL="0">
               <a:lnSpc>
-                <a:spcPts val="1680"/>
-              </a:lnSpc>
-              <a:spcBef>
-                <a:spcPts val="300"/>
-              </a:spcBef>
+                <a:spcPts val="1620"/>
+              </a:lnSpc>
               <a:spcAft>
                 <a:spcPts val="300"/>
               </a:spcAft>
@@ -4412,19 +4976,42 @@
                 <a:ea typeface="Georgia" pitchFamily="34" charset="-122"/>
                 <a:cs typeface="Georgia" pitchFamily="34" charset="-120"/>
               </a:rPr>
-              <a:t>activities/</a:t>
-            </a:r>
-            <a:pPr algn="l" indent="0" marL="0">
-              <a:lnSpc>
-                <a:spcPts val="1680"/>
-              </a:lnSpc>
-              <a:spcBef>
-                <a:spcPts val="300"/>
-              </a:spcBef>
-              <a:spcAft>
-                <a:spcPts val="300"/>
-              </a:spcAft>
-              <a:buNone/>
+              <a:t> For an 8-bit number:</a:t>
+            </a:r>
+            <a:endParaRPr lang="en-US" sz="1200" dirty="0"/>
+          </a:p>
+        </p:txBody>
+      </p:sp>
+      <p:sp>
+        <p:nvSpPr>
+          <p:cNvPr id="6" name="Text 4"/>
+          <p:cNvSpPr/>
+          <p:nvPr/>
+        </p:nvSpPr>
+        <p:spPr>
+          <a:xfrm>
+            <a:off x="634901" y="1856036"/>
+            <a:ext cx="8102798" cy="525661"/>
+          </a:xfrm>
+          <a:prstGeom prst="rect">
+            <a:avLst/>
+          </a:prstGeom>
+          <a:noFill/>
+          <a:ln/>
+        </p:spPr>
+        <p:txBody>
+          <a:bodyPr wrap="square" lIns="0" tIns="0" rIns="0" bIns="0" rtlCol="0" anchor="t"/>
+          <a:lstStyle/>
+          <a:p>
+            <a:pPr algn="l" marL="342900" indent="-342900">
+              <a:lnSpc>
+                <a:spcPts val="1620"/>
+              </a:lnSpc>
+              <a:spcAft>
+                <a:spcPts val="300"/>
+              </a:spcAft>
+              <a:buSzPct val="100000"/>
+              <a:buChar char="•"/>
             </a:pPr>
             <a:r>
               <a:rPr lang="en-US" sz="1200" dirty="0">
@@ -4435,15 +5022,39 @@
                 <a:ea typeface="Georgia" pitchFamily="34" charset="-122"/>
                 <a:cs typeface="Georgia" pitchFamily="34" charset="-120"/>
               </a:rPr>
-              <a:t>). Today's slice: focus on the part of the activity that reinforces Two's Complement in Computers.</a:t>
+              <a:t>One's complement: flip every bit (= "all from 1," the binary analogue of "all from 9").</a:t>
             </a:r>
             <a:endParaRPr lang="en-US" sz="1200" dirty="0"/>
           </a:p>
-        </p:txBody>
-      </p:sp>
-      <p:sp>
-        <p:nvSpPr>
-          <p:cNvPr id="5" name="Text 3"/>
+          <a:p>
+            <a:pPr algn="l" marL="342900" indent="-342900">
+              <a:lnSpc>
+                <a:spcPts val="1620"/>
+              </a:lnSpc>
+              <a:spcAft>
+                <a:spcPts val="300"/>
+              </a:spcAft>
+              <a:buSzPct val="100000"/>
+              <a:buChar char="•"/>
+            </a:pPr>
+            <a:r>
+              <a:rPr lang="en-US" sz="1200" dirty="0">
+                <a:solidFill>
+                  <a:srgbClr val="1A1A1A"/>
+                </a:solidFill>
+                <a:latin typeface="Georgia" pitchFamily="34" charset="0"/>
+                <a:ea typeface="Georgia" pitchFamily="34" charset="-122"/>
+                <a:cs typeface="Georgia" pitchFamily="34" charset="-120"/>
+              </a:rPr>
+              <a:t>Two's complement: one's complement + 1.</a:t>
+            </a:r>
+            <a:endParaRPr lang="en-US" sz="1200" dirty="0"/>
+          </a:p>
+        </p:txBody>
+      </p:sp>
+      <p:sp>
+        <p:nvSpPr>
+          <p:cNvPr id="7" name="Text 5"/>
           <p:cNvSpPr/>
           <p:nvPr/>
         </p:nvSpPr>
@@ -4593,7 +5204,7 @@
                 <a:ea typeface="Times New Roman" pitchFamily="34" charset="-122"/>
                 <a:cs typeface="Times New Roman" pitchFamily="34" charset="-120"/>
               </a:rPr>
-              <a:t>Wrap-up (5 min)</a:t>
+              <a:t>Core (20 min) (cont.)</a:t>
             </a:r>
             <a:endParaRPr lang="en-US" sz="1800" dirty="0"/>
           </a:p>
@@ -4607,8 +5218,8 @@
         </p:nvSpPr>
         <p:spPr>
           <a:xfrm>
-            <a:off x="406301" y="870942"/>
-            <a:ext cx="8498026" cy="213271"/>
+            <a:off x="634901" y="883593"/>
+            <a:ext cx="8102798" cy="281880"/>
           </a:xfrm>
           <a:prstGeom prst="rect">
             <a:avLst/>
@@ -4620,13 +5231,31 @@
           <a:bodyPr wrap="square" lIns="0" tIns="0" rIns="0" bIns="0" rtlCol="0" anchor="t"/>
           <a:lstStyle/>
           <a:p>
+            <a:pPr algn="l" marL="342900" indent="-342900">
+              <a:lnSpc>
+                <a:spcPts val="1620"/>
+              </a:lnSpc>
+              <a:spcAft>
+                <a:spcPts val="300"/>
+              </a:spcAft>
+              <a:buSzPct val="100000"/>
+              <a:buChar char="•"/>
+            </a:pPr>
+            <a:r>
+              <a:rPr lang="en-US" sz="1200" b="1" dirty="0">
+                <a:solidFill>
+                  <a:srgbClr val="1A1A1A"/>
+                </a:solidFill>
+                <a:latin typeface="Georgia" pitchFamily="34" charset="0"/>
+                <a:ea typeface="Georgia" pitchFamily="34" charset="-122"/>
+                <a:cs typeface="Georgia" pitchFamily="34" charset="-120"/>
+              </a:rPr>
+              <a:t>Worked example.</a:t>
+            </a:r>
             <a:pPr algn="l" indent="0" marL="0">
               <a:lnSpc>
-                <a:spcPts val="1680"/>
-              </a:lnSpc>
-              <a:spcBef>
-                <a:spcPts val="300"/>
-              </a:spcBef>
+                <a:spcPts val="1620"/>
+              </a:lnSpc>
               <a:spcAft>
                 <a:spcPts val="300"/>
               </a:spcAft>
@@ -4641,42 +5270,42 @@
                 <a:ea typeface="Georgia" pitchFamily="34" charset="-122"/>
                 <a:cs typeface="Georgia" pitchFamily="34" charset="-120"/>
               </a:rPr>
-              <a:t>– One-sentence exit ticket: </a:t>
-            </a:r>
-            <a:pPr algn="l" indent="0" marL="0">
-              <a:lnSpc>
-                <a:spcPts val="1680"/>
-              </a:lnSpc>
-              <a:spcBef>
-                <a:spcPts val="300"/>
-              </a:spcBef>
-              <a:spcAft>
-                <a:spcPts val="300"/>
-              </a:spcAft>
-              <a:buNone/>
-            </a:pPr>
-            <a:r>
-              <a:rPr lang="en-US" sz="1200" i="1" dirty="0">
-                <a:solidFill>
-                  <a:srgbClr val="1A1A1A"/>
-                </a:solidFill>
-                <a:latin typeface="Georgia" pitchFamily="34" charset="0"/>
-                <a:ea typeface="Georgia" pitchFamily="34" charset="-122"/>
-                <a:cs typeface="Georgia" pitchFamily="34" charset="-120"/>
-              </a:rPr>
-              <a:t>"What's one thing you learned today?"</a:t>
-            </a:r>
-            <a:pPr algn="l" indent="0" marL="0">
-              <a:lnSpc>
-                <a:spcPts val="1680"/>
-              </a:lnSpc>
-              <a:spcBef>
-                <a:spcPts val="300"/>
-              </a:spcBef>
-              <a:spcAft>
-                <a:spcPts val="300"/>
-              </a:spcAft>
-              <a:buNone/>
+              <a:t> Compute 9 − 5 in 8-bit binary:</a:t>
+            </a:r>
+            <a:endParaRPr lang="en-US" sz="1200" dirty="0"/>
+          </a:p>
+        </p:txBody>
+      </p:sp>
+      <p:sp>
+        <p:nvSpPr>
+          <p:cNvPr id="5" name="Text 3"/>
+          <p:cNvSpPr/>
+          <p:nvPr/>
+        </p:nvSpPr>
+        <p:spPr>
+          <a:xfrm>
+            <a:off x="634901" y="1266974"/>
+            <a:ext cx="8102798" cy="1013222"/>
+          </a:xfrm>
+          <a:prstGeom prst="rect">
+            <a:avLst/>
+          </a:prstGeom>
+          <a:noFill/>
+          <a:ln/>
+        </p:spPr>
+        <p:txBody>
+          <a:bodyPr wrap="square" lIns="0" tIns="0" rIns="0" bIns="0" rtlCol="0" anchor="t"/>
+          <a:lstStyle/>
+          <a:p>
+            <a:pPr algn="l" marL="342900" indent="-342900">
+              <a:lnSpc>
+                <a:spcPts val="1620"/>
+              </a:lnSpc>
+              <a:spcAft>
+                <a:spcPts val="300"/>
+              </a:spcAft>
+              <a:buSzPct val="100000"/>
+              <a:buChar char="•"/>
             </a:pPr>
             <a:r>
               <a:rPr lang="en-US" sz="1200" dirty="0">
@@ -4687,15 +5316,87 @@
                 <a:ea typeface="Georgia" pitchFamily="34" charset="-122"/>
                 <a:cs typeface="Georgia" pitchFamily="34" charset="-120"/>
               </a:rPr>
-              <a:t> – Preview tomorrow.</a:t>
+              <a:t>5 = 00000101</a:t>
             </a:r>
             <a:endParaRPr lang="en-US" sz="1200" dirty="0"/>
           </a:p>
-        </p:txBody>
-      </p:sp>
-      <p:sp>
-        <p:nvSpPr>
-          <p:cNvPr id="5" name="Text 3"/>
+          <a:p>
+            <a:pPr algn="l" marL="342900" indent="-342900">
+              <a:lnSpc>
+                <a:spcPts val="1620"/>
+              </a:lnSpc>
+              <a:spcAft>
+                <a:spcPts val="300"/>
+              </a:spcAft>
+              <a:buSzPct val="100000"/>
+              <a:buChar char="•"/>
+            </a:pPr>
+            <a:r>
+              <a:rPr lang="en-US" sz="1200" dirty="0">
+                <a:solidFill>
+                  <a:srgbClr val="1A1A1A"/>
+                </a:solidFill>
+                <a:latin typeface="Georgia" pitchFamily="34" charset="0"/>
+                <a:ea typeface="Georgia" pitchFamily="34" charset="-122"/>
+                <a:cs typeface="Georgia" pitchFamily="34" charset="-120"/>
+              </a:rPr>
+              <a:t>Flip: 11111010 (one's complement)</a:t>
+            </a:r>
+            <a:endParaRPr lang="en-US" sz="1200" dirty="0"/>
+          </a:p>
+          <a:p>
+            <a:pPr algn="l" marL="342900" indent="-342900">
+              <a:lnSpc>
+                <a:spcPts val="1620"/>
+              </a:lnSpc>
+              <a:spcAft>
+                <a:spcPts val="300"/>
+              </a:spcAft>
+              <a:buSzPct val="100000"/>
+              <a:buChar char="•"/>
+            </a:pPr>
+            <a:r>
+              <a:rPr lang="en-US" sz="1200" dirty="0">
+                <a:solidFill>
+                  <a:srgbClr val="1A1A1A"/>
+                </a:solidFill>
+                <a:latin typeface="Georgia" pitchFamily="34" charset="0"/>
+                <a:ea typeface="Georgia" pitchFamily="34" charset="-122"/>
+                <a:cs typeface="Georgia" pitchFamily="34" charset="-120"/>
+              </a:rPr>
+              <a:t>Add 1: 11111011 (two's complement)</a:t>
+            </a:r>
+            <a:endParaRPr lang="en-US" sz="1200" dirty="0"/>
+          </a:p>
+          <a:p>
+            <a:pPr algn="l" marL="342900" indent="-342900">
+              <a:lnSpc>
+                <a:spcPts val="1620"/>
+              </a:lnSpc>
+              <a:spcAft>
+                <a:spcPts val="300"/>
+              </a:spcAft>
+              <a:buSzPct val="100000"/>
+              <a:buChar char="•"/>
+            </a:pPr>
+            <a:r>
+              <a:rPr lang="en-US" sz="1200" dirty="0">
+                <a:solidFill>
+                  <a:srgbClr val="1A1A1A"/>
+                </a:solidFill>
+                <a:latin typeface="Georgia" pitchFamily="34" charset="0"/>
+                <a:ea typeface="Georgia" pitchFamily="34" charset="-122"/>
+                <a:cs typeface="Georgia" pitchFamily="34" charset="-120"/>
+              </a:rPr>
+              <a:t>Add to 9 = 00001001: 00001001 + 11111011 = 100000100, drop the overflow bit → 00000100 = 4. ✓</a:t>
+            </a:r>
+            <a:endParaRPr lang="en-US" sz="1200" dirty="0"/>
+          </a:p>
+        </p:txBody>
+      </p:sp>
+      <p:sp>
+        <p:nvSpPr>
+          <p:cNvPr id="6" name="Text 4"/>
           <p:cNvSpPr/>
           <p:nvPr/>
         </p:nvSpPr>
@@ -4845,7 +5546,7 @@
                 <a:ea typeface="Times New Roman" pitchFamily="34" charset="-122"/>
                 <a:cs typeface="Times New Roman" pitchFamily="34" charset="-120"/>
               </a:rPr>
-              <a:t>Homework</a:t>
+              <a:t>Core (20 min) (cont.)</a:t>
             </a:r>
             <a:endParaRPr lang="en-US" sz="1800" dirty="0"/>
           </a:p>
@@ -4859,8 +5560,8 @@
         </p:nvSpPr>
         <p:spPr>
           <a:xfrm>
-            <a:off x="406301" y="870942"/>
-            <a:ext cx="8498026" cy="222796"/>
+            <a:off x="634901" y="883593"/>
+            <a:ext cx="8102798" cy="281880"/>
           </a:xfrm>
           <a:prstGeom prst="rect">
             <a:avLst/>
@@ -4872,13 +5573,31 @@
           <a:bodyPr wrap="square" lIns="0" tIns="0" rIns="0" bIns="0" rtlCol="0" anchor="t"/>
           <a:lstStyle/>
           <a:p>
+            <a:pPr algn="l" marL="342900" indent="-342900">
+              <a:lnSpc>
+                <a:spcPts val="1620"/>
+              </a:lnSpc>
+              <a:spcAft>
+                <a:spcPts val="300"/>
+              </a:spcAft>
+              <a:buSzPct val="100000"/>
+              <a:buChar char="•"/>
+            </a:pPr>
+            <a:r>
+              <a:rPr lang="en-US" sz="1200" b="1" dirty="0">
+                <a:solidFill>
+                  <a:srgbClr val="1A1A1A"/>
+                </a:solidFill>
+                <a:latin typeface="Georgia" pitchFamily="34" charset="0"/>
+                <a:ea typeface="Georgia" pitchFamily="34" charset="-122"/>
+                <a:cs typeface="Georgia" pitchFamily="34" charset="-120"/>
+              </a:rPr>
+              <a:t>Source.</a:t>
+            </a:r>
             <a:pPr algn="l" indent="0" marL="0">
               <a:lnSpc>
-                <a:spcPts val="1680"/>
-              </a:lnSpc>
-              <a:spcBef>
-                <a:spcPts val="300"/>
-              </a:spcBef>
+                <a:spcPts val="1620"/>
+              </a:lnSpc>
               <a:spcAft>
                 <a:spcPts val="300"/>
               </a:spcAft>
@@ -4893,15 +5612,32 @@
                 <a:ea typeface="Georgia" pitchFamily="34" charset="-122"/>
                 <a:cs typeface="Georgia" pitchFamily="34" charset="-120"/>
               </a:rPr>
-              <a:t>(See </a:t>
+              <a:t> D.E. Knuth, </a:t>
             </a:r>
             <a:pPr algn="l" indent="0" marL="0">
               <a:lnSpc>
-                <a:spcPts val="1680"/>
-              </a:lnSpc>
-              <a:spcBef>
-                <a:spcPts val="300"/>
-              </a:spcBef>
+                <a:spcPts val="1620"/>
+              </a:lnSpc>
+              <a:spcAft>
+                <a:spcPts val="300"/>
+              </a:spcAft>
+              <a:buNone/>
+            </a:pPr>
+            <a:r>
+              <a:rPr lang="en-US" sz="1200" i="1" dirty="0">
+                <a:solidFill>
+                  <a:srgbClr val="1A1A1A"/>
+                </a:solidFill>
+                <a:latin typeface="Georgia" pitchFamily="34" charset="0"/>
+                <a:ea typeface="Georgia" pitchFamily="34" charset="-122"/>
+                <a:cs typeface="Georgia" pitchFamily="34" charset="-120"/>
+              </a:rPr>
+              <a:t>The Art of Computer Programming</a:t>
+            </a:r>
+            <a:pPr algn="l" indent="0" marL="0">
+              <a:lnSpc>
+                <a:spcPts val="1620"/>
+              </a:lnSpc>
               <a:spcAft>
                 <a:spcPts val="300"/>
               </a:spcAft>
@@ -4916,15 +5652,58 @@
                 <a:ea typeface="Georgia" pitchFamily="34" charset="-122"/>
                 <a:cs typeface="Georgia" pitchFamily="34" charset="-120"/>
               </a:rPr>
-              <a:t>homework.md</a:t>
+              <a:t>, vol. 2 — full treatment.</a:t>
+            </a:r>
+            <a:endParaRPr lang="en-US" sz="1200" dirty="0"/>
+          </a:p>
+        </p:txBody>
+      </p:sp>
+      <p:sp>
+        <p:nvSpPr>
+          <p:cNvPr id="5" name="Text 3"/>
+          <p:cNvSpPr/>
+          <p:nvPr/>
+        </p:nvSpPr>
+        <p:spPr>
+          <a:xfrm>
+            <a:off x="634901" y="1266974"/>
+            <a:ext cx="8102798" cy="693241"/>
+          </a:xfrm>
+          <a:prstGeom prst="rect">
+            <a:avLst/>
+          </a:prstGeom>
+          <a:noFill/>
+          <a:ln/>
+        </p:spPr>
+        <p:txBody>
+          <a:bodyPr wrap="square" lIns="0" tIns="0" rIns="0" bIns="0" rtlCol="0" anchor="t"/>
+          <a:lstStyle/>
+          <a:p>
+            <a:pPr algn="l" marL="342900" indent="-342900">
+              <a:lnSpc>
+                <a:spcPts val="1620"/>
+              </a:lnSpc>
+              <a:spcAft>
+                <a:spcPts val="300"/>
+              </a:spcAft>
+              <a:buSzPct val="100000"/>
+              <a:buChar char="•"/>
+            </a:pPr>
+            <a:r>
+              <a:rPr lang="en-US" sz="1200" b="1" dirty="0">
+                <a:solidFill>
+                  <a:srgbClr val="1A1A1A"/>
+                </a:solidFill>
+                <a:latin typeface="Georgia" pitchFamily="34" charset="0"/>
+                <a:ea typeface="Georgia" pitchFamily="34" charset="-122"/>
+                <a:cs typeface="Georgia" pitchFamily="34" charset="-120"/>
+              </a:rPr>
+              <a:t>Critical-thinking close.</a:t>
             </a:r>
             <a:pPr algn="l" indent="0" marL="0">
               <a:lnSpc>
-                <a:spcPts val="1680"/>
-              </a:lnSpc>
-              <a:spcBef>
-                <a:spcPts val="300"/>
-              </a:spcBef>
+                <a:spcPts val="1620"/>
+              </a:lnSpc>
               <a:spcAft>
                 <a:spcPts val="300"/>
               </a:spcAft>
@@ -4939,7 +5718,27 @@
                 <a:ea typeface="Georgia" pitchFamily="34" charset="-122"/>
                 <a:cs typeface="Georgia" pitchFamily="34" charset="-120"/>
               </a:rPr>
-              <a:t> for today's task.)</a:t>
+              <a:t> </a:t>
+            </a:r>
+            <a:pPr algn="l" indent="0" marL="0">
+              <a:lnSpc>
+                <a:spcPts val="1620"/>
+              </a:lnSpc>
+              <a:spcAft>
+                <a:spcPts val="300"/>
+              </a:spcAft>
+              <a:buNone/>
+            </a:pPr>
+            <a:r>
+              <a:rPr lang="en-US" sz="1200" i="1" dirty="0">
+                <a:solidFill>
+                  <a:srgbClr val="1A1A1A"/>
+                </a:solidFill>
+                <a:latin typeface="Georgia" pitchFamily="34" charset="0"/>
+                <a:ea typeface="Georgia" pitchFamily="34" charset="-122"/>
+                <a:cs typeface="Georgia" pitchFamily="34" charset="-120"/>
+              </a:rPr>
+              <a:t>"The Nikhilam sūtra (or its decimal-complement principle) and binary two's complement both date their origins to vastly different traditions and eras. What does this tell us about (a) the universality of certain algorithmic ideas and (b) the limits of cultural-priority claims?"</a:t>
             </a:r>
             <a:endParaRPr lang="en-US" sz="1200" dirty="0"/>
           </a:p>
@@ -4947,7 +5746,7 @@
       </p:sp>
       <p:sp>
         <p:nvSpPr>
-          <p:cNvPr id="5" name="Text 3"/>
+          <p:cNvPr id="6" name="Text 4"/>
           <p:cNvSpPr/>
           <p:nvPr/>
         </p:nvSpPr>
